--- a/output/presentation/Soutenance_PFA_Portfolio_ML_INPT_EURAFRIC.pptx
+++ b/output/presentation/Soutenance_PFA_Portfolio_ML_INPT_EURAFRIC.pptx
@@ -21,10 +21,15 @@
     <p:sldId xmlns:r="http://schemas.openxmlformats.org/officeDocument/2006/relationships" id="266" r:id="Rfa6d69768af34a43"/>
     <p:sldId xmlns:r="http://schemas.openxmlformats.org/officeDocument/2006/relationships" id="267" r:id="Rebbdf58fb6c24cbb"/>
     <p:sldId xmlns:r="http://schemas.openxmlformats.org/officeDocument/2006/relationships" id="268" r:id="Rea3eb73d639f4416"/>
+    <p:sldId xmlns:ns0="http://schemas.openxmlformats.org/officeDocument/2006/relationships" id="274" ns0:id="rId24"/>
+    <p:sldId xmlns:ns0="http://schemas.openxmlformats.org/officeDocument/2006/relationships" id="275" ns0:id="rId25"/>
+    <p:sldId xmlns:ns0="http://schemas.openxmlformats.org/officeDocument/2006/relationships" id="276" ns0:id="rId26"/>
+    <p:sldId xmlns:ns0="http://schemas.openxmlformats.org/officeDocument/2006/relationships" id="277" ns0:id="rId27"/>
     <p:sldId xmlns:r="http://schemas.openxmlformats.org/officeDocument/2006/relationships" id="269" r:id="Rc46d43967ae14217"/>
     <p:sldId xmlns:r="http://schemas.openxmlformats.org/officeDocument/2006/relationships" id="270" r:id="R570479f6abc143be"/>
     <p:sldId xmlns:r="http://schemas.openxmlformats.org/officeDocument/2006/relationships" id="271" r:id="R8197a2e283d047d2"/>
     <p:sldId xmlns:r="http://schemas.openxmlformats.org/officeDocument/2006/relationships" id="272" r:id="Rc24437f2c9e24674"/>
+    <p:sldId xmlns:ns0="http://schemas.openxmlformats.org/officeDocument/2006/relationships" id="278" ns0:id="rId28"/>
     <p:sldId xmlns:r="http://schemas.openxmlformats.org/officeDocument/2006/relationships" id="273" r:id="Re7c87c24c9264256"/>
   </p:sldIdLst>
   <p:sldSz cx="12192000" cy="6858000"/>
@@ -2936,6 +2941,10 @@
             <a:prstDash val="solid"/>
           </a:ln>
         </p:spPr>
+        <p:txBody xmlns:a="http://schemas.openxmlformats.org/drawingml/2006/main">
+          <a:bodyPr/>
+          <a:p/>
+        </p:txBody>
       </p:sp>
       <p:sp>
         <p:nvSpPr>
@@ -3164,6 +3173,10 @@
             <a:prstDash val="solid"/>
           </a:ln>
         </p:spPr>
+        <p:txBody xmlns:a="http://schemas.openxmlformats.org/drawingml/2006/main">
+          <a:bodyPr/>
+          <a:p/>
+        </p:txBody>
       </p:sp>
       <p:sp>
         <p:nvSpPr>
@@ -3357,6 +3370,10 @@
             <a:prstDash val="solid"/>
           </a:ln>
         </p:spPr>
+        <p:txBody xmlns:a="http://schemas.openxmlformats.org/drawingml/2006/main">
+          <a:bodyPr/>
+          <a:p/>
+        </p:txBody>
       </p:sp>
       <p:sp>
         <p:nvSpPr>
@@ -3653,6 +3670,10 @@
             <a:prstDash val="solid"/>
           </a:ln>
         </p:spPr>
+        <p:txBody xmlns:a="http://schemas.openxmlformats.org/drawingml/2006/main">
+          <a:bodyPr/>
+          <a:p/>
+        </p:txBody>
       </p:sp>
       <p:pic>
         <p:nvPicPr>
@@ -3984,6 +4005,10 @@
             <a:prstDash val="solid"/>
           </a:ln>
         </p:spPr>
+        <p:txBody xmlns:a="http://schemas.openxmlformats.org/drawingml/2006/main">
+          <a:bodyPr/>
+          <a:p/>
+        </p:txBody>
       </p:sp>
       <p:sp>
         <p:nvSpPr>
@@ -4214,6 +4239,10 @@
             <a:prstDash val="solid"/>
           </a:ln>
         </p:spPr>
+        <p:txBody xmlns:a="http://schemas.openxmlformats.org/drawingml/2006/main">
+          <a:bodyPr/>
+          <a:p/>
+        </p:txBody>
       </p:sp>
       <p:sp>
         <p:nvSpPr>
@@ -5120,6 +5149,10 @@
             <a:prstDash val="solid"/>
           </a:ln>
         </p:spPr>
+        <p:txBody xmlns:a="http://schemas.openxmlformats.org/drawingml/2006/main">
+          <a:bodyPr/>
+          <a:p/>
+        </p:txBody>
       </p:sp>
       <p:sp>
         <p:nvSpPr>
@@ -5153,6 +5186,10 @@
             <a:prstDash val="solid"/>
           </a:ln>
         </p:spPr>
+        <p:txBody xmlns:a="http://schemas.openxmlformats.org/drawingml/2006/main">
+          <a:bodyPr/>
+          <a:p/>
+        </p:txBody>
       </p:sp>
       <p:sp>
         <p:nvSpPr>
@@ -5244,6 +5281,10 @@
             <a:prstDash val="solid"/>
           </a:ln>
         </p:spPr>
+        <p:txBody xmlns:a="http://schemas.openxmlformats.org/drawingml/2006/main">
+          <a:bodyPr/>
+          <a:p/>
+        </p:txBody>
       </p:sp>
       <p:sp>
         <p:nvSpPr>
@@ -5393,6 +5434,10 @@
             <a:prstDash val="solid"/>
           </a:ln>
         </p:spPr>
+        <p:txBody xmlns:a="http://schemas.openxmlformats.org/drawingml/2006/main">
+          <a:bodyPr/>
+          <a:p/>
+        </p:txBody>
       </p:sp>
       <p:sp>
         <p:nvSpPr>
@@ -5542,6 +5587,10 @@
             <a:prstDash val="solid"/>
           </a:ln>
         </p:spPr>
+        <p:txBody xmlns:a="http://schemas.openxmlformats.org/drawingml/2006/main">
+          <a:bodyPr/>
+          <a:p/>
+        </p:txBody>
       </p:sp>
       <p:sp>
         <p:nvSpPr>
@@ -5633,6 +5682,10 @@
             <a:prstDash val="solid"/>
           </a:ln>
         </p:spPr>
+        <p:txBody xmlns:a="http://schemas.openxmlformats.org/drawingml/2006/main">
+          <a:bodyPr/>
+          <a:p/>
+        </p:txBody>
       </p:sp>
       <p:sp>
         <p:nvSpPr>
@@ -5782,6 +5835,10 @@
             <a:prstDash val="solid"/>
           </a:ln>
         </p:spPr>
+        <p:txBody xmlns:a="http://schemas.openxmlformats.org/drawingml/2006/main">
+          <a:bodyPr/>
+          <a:p/>
+        </p:txBody>
       </p:sp>
       <p:sp>
         <p:nvSpPr>
@@ -6194,6 +6251,10 @@
             <a:prstDash val="solid"/>
           </a:ln>
         </p:spPr>
+        <p:txBody xmlns:a="http://schemas.openxmlformats.org/drawingml/2006/main">
+          <a:bodyPr/>
+          <a:p/>
+        </p:txBody>
       </p:sp>
       <p:pic>
         <p:nvPicPr>
@@ -6481,6 +6542,10 @@
             <a:prstDash val="solid"/>
           </a:ln>
         </p:spPr>
+        <p:txBody xmlns:a="http://schemas.openxmlformats.org/drawingml/2006/main">
+          <a:bodyPr/>
+          <a:p/>
+        </p:txBody>
       </p:sp>
       <p:sp>
         <p:nvSpPr>
@@ -6893,6 +6958,10 @@
             <a:prstDash val="solid"/>
           </a:ln>
         </p:spPr>
+        <p:txBody xmlns:a="http://schemas.openxmlformats.org/drawingml/2006/main">
+          <a:bodyPr/>
+          <a:p/>
+        </p:txBody>
       </p:sp>
       <p:pic>
         <p:nvPicPr>
@@ -7365,6 +7434,10 @@
             <a:prstDash val="solid"/>
           </a:ln>
         </p:spPr>
+        <p:txBody xmlns:a="http://schemas.openxmlformats.org/drawingml/2006/main">
+          <a:bodyPr/>
+          <a:p/>
+        </p:txBody>
       </p:sp>
       <p:sp>
         <p:nvSpPr>
@@ -7680,7 +7753,7 @@
                 <a:ea typeface="Arial"/>
                 <a:cs typeface="Arial"/>
               </a:rPr>
-              <a:t>14</a:t>
+              <a:t>18</a:t>
             </a:r>
           </a:p>
         </p:txBody>
@@ -7719,6 +7792,10 @@
             <a:prstDash val="solid"/>
           </a:ln>
         </p:spPr>
+        <p:txBody xmlns:a="http://schemas.openxmlformats.org/drawingml/2006/main">
+          <a:bodyPr/>
+          <a:p/>
+        </p:txBody>
       </p:sp>
       <p:pic>
         <p:nvPicPr>
@@ -7774,6 +7851,10 @@
             <a:prstDash val="solid"/>
           </a:ln>
         </p:spPr>
+        <p:txBody xmlns:a="http://schemas.openxmlformats.org/drawingml/2006/main">
+          <a:bodyPr/>
+          <a:p/>
+        </p:txBody>
       </p:sp>
       <p:sp>
         <p:nvSpPr>
@@ -7923,6 +8004,10 @@
             <a:prstDash val="solid"/>
           </a:ln>
         </p:spPr>
+        <p:txBody xmlns:a="http://schemas.openxmlformats.org/drawingml/2006/main">
+          <a:bodyPr/>
+          <a:p/>
+        </p:txBody>
       </p:sp>
       <p:sp>
         <p:nvSpPr>
@@ -8072,6 +8157,10 @@
             <a:prstDash val="solid"/>
           </a:ln>
         </p:spPr>
+        <p:txBody xmlns:a="http://schemas.openxmlformats.org/drawingml/2006/main">
+          <a:bodyPr/>
+          <a:p/>
+        </p:txBody>
       </p:sp>
       <p:sp>
         <p:nvSpPr>
@@ -8221,6 +8310,10 @@
             <a:prstDash val="solid"/>
           </a:ln>
         </p:spPr>
+        <p:txBody xmlns:a="http://schemas.openxmlformats.org/drawingml/2006/main">
+          <a:bodyPr/>
+          <a:p/>
+        </p:txBody>
       </p:sp>
       <p:sp>
         <p:nvSpPr>
@@ -8536,7 +8629,7 @@
                 <a:ea typeface="Arial"/>
                 <a:cs typeface="Arial"/>
               </a:rPr>
-              <a:t>15</a:t>
+              <a:t>19</a:t>
             </a:r>
           </a:p>
         </p:txBody>
@@ -8575,6 +8668,10 @@
             <a:prstDash val="solid"/>
           </a:ln>
         </p:spPr>
+        <p:txBody xmlns:a="http://schemas.openxmlformats.org/drawingml/2006/main">
+          <a:bodyPr/>
+          <a:p/>
+        </p:txBody>
       </p:sp>
       <p:pic>
         <p:nvPicPr>
@@ -8690,6 +8787,10 @@
             <a:prstDash val="solid"/>
           </a:ln>
         </p:spPr>
+        <p:txBody xmlns:a="http://schemas.openxmlformats.org/drawingml/2006/main">
+          <a:bodyPr/>
+          <a:p/>
+        </p:txBody>
       </p:sp>
       <p:pic>
         <p:nvPicPr>
@@ -9027,7 +9128,7 @@
                 <a:ea typeface="Arial"/>
                 <a:cs typeface="Arial"/>
               </a:rPr>
-              <a:t>16</a:t>
+              <a:t>20</a:t>
             </a:r>
           </a:p>
         </p:txBody>
@@ -9066,6 +9167,10 @@
             <a:prstDash val="solid"/>
           </a:ln>
         </p:spPr>
+        <p:txBody xmlns:a="http://schemas.openxmlformats.org/drawingml/2006/main">
+          <a:bodyPr/>
+          <a:p/>
+        </p:txBody>
       </p:sp>
       <p:sp>
         <p:nvSpPr>
@@ -9155,6 +9260,10 @@
             <a:prstDash val="solid"/>
           </a:ln>
         </p:spPr>
+        <p:txBody xmlns:a="http://schemas.openxmlformats.org/drawingml/2006/main">
+          <a:bodyPr/>
+          <a:p/>
+        </p:txBody>
       </p:sp>
       <p:sp>
         <p:nvSpPr>
@@ -9360,6 +9469,10 @@
             <a:prstDash val="solid"/>
           </a:ln>
         </p:spPr>
+        <p:txBody xmlns:a="http://schemas.openxmlformats.org/drawingml/2006/main">
+          <a:bodyPr/>
+          <a:p/>
+        </p:txBody>
       </p:sp>
       <p:sp>
         <p:nvSpPr>
@@ -9565,6 +9678,10 @@
             <a:prstDash val="solid"/>
           </a:ln>
         </p:spPr>
+        <p:txBody xmlns:a="http://schemas.openxmlformats.org/drawingml/2006/main">
+          <a:bodyPr/>
+          <a:p/>
+        </p:txBody>
       </p:sp>
       <p:sp>
         <p:nvSpPr>
@@ -9770,6 +9887,10 @@
             <a:prstDash val="solid"/>
           </a:ln>
         </p:spPr>
+        <p:txBody xmlns:a="http://schemas.openxmlformats.org/drawingml/2006/main">
+          <a:bodyPr/>
+          <a:p/>
+        </p:txBody>
       </p:sp>
       <p:sp>
         <p:nvSpPr>
@@ -9975,6 +10096,10 @@
             <a:prstDash val="solid"/>
           </a:ln>
         </p:spPr>
+        <p:txBody xmlns:a="http://schemas.openxmlformats.org/drawingml/2006/main">
+          <a:bodyPr/>
+          <a:p/>
+        </p:txBody>
       </p:sp>
       <p:sp>
         <p:nvSpPr>
@@ -10180,6 +10305,10 @@
             <a:prstDash val="solid"/>
           </a:ln>
         </p:spPr>
+        <p:txBody xmlns:a="http://schemas.openxmlformats.org/drawingml/2006/main">
+          <a:bodyPr/>
+          <a:p/>
+        </p:txBody>
       </p:sp>
       <p:sp>
         <p:nvSpPr>
@@ -10389,6 +10518,10 @@
             <a:prstDash val="solid"/>
           </a:ln>
         </p:spPr>
+        <p:txBody xmlns:a="http://schemas.openxmlformats.org/drawingml/2006/main">
+          <a:bodyPr/>
+          <a:p/>
+        </p:txBody>
       </p:sp>
       <p:pic>
         <p:nvPicPr>
@@ -11004,7 +11137,7 @@
                 <a:ea typeface="Arial"/>
                 <a:cs typeface="Arial"/>
               </a:rPr>
-              <a:t>17</a:t>
+              <a:t>21</a:t>
             </a:r>
           </a:p>
         </p:txBody>
@@ -11097,6 +11230,10 @@
             <a:prstDash val="solid"/>
           </a:ln>
         </p:spPr>
+        <p:txBody xmlns:a="http://schemas.openxmlformats.org/drawingml/2006/main">
+          <a:bodyPr/>
+          <a:p/>
+        </p:txBody>
       </p:sp>
       <p:sp>
         <p:nvSpPr>
@@ -11302,6 +11439,10 @@
             <a:prstDash val="solid"/>
           </a:ln>
         </p:spPr>
+        <p:txBody xmlns:a="http://schemas.openxmlformats.org/drawingml/2006/main">
+          <a:bodyPr/>
+          <a:p/>
+        </p:txBody>
       </p:sp>
       <p:sp>
         <p:nvSpPr>
@@ -11507,6 +11648,10 @@
             <a:prstDash val="solid"/>
           </a:ln>
         </p:spPr>
+        <p:txBody xmlns:a="http://schemas.openxmlformats.org/drawingml/2006/main">
+          <a:bodyPr/>
+          <a:p/>
+        </p:txBody>
       </p:sp>
       <p:sp>
         <p:nvSpPr>
@@ -11712,6 +11857,10 @@
             <a:prstDash val="solid"/>
           </a:ln>
         </p:spPr>
+        <p:txBody xmlns:a="http://schemas.openxmlformats.org/drawingml/2006/main">
+          <a:bodyPr/>
+          <a:p/>
+        </p:txBody>
       </p:sp>
       <p:sp>
         <p:nvSpPr>
@@ -11917,6 +12066,10 @@
             <a:prstDash val="solid"/>
           </a:ln>
         </p:spPr>
+        <p:txBody xmlns:a="http://schemas.openxmlformats.org/drawingml/2006/main">
+          <a:bodyPr/>
+          <a:p/>
+        </p:txBody>
       </p:sp>
       <p:sp>
         <p:nvSpPr>
@@ -12066,6 +12219,10 @@
             <a:prstDash val="solid"/>
           </a:ln>
         </p:spPr>
+        <p:txBody xmlns:a="http://schemas.openxmlformats.org/drawingml/2006/main">
+          <a:bodyPr/>
+          <a:p/>
+        </p:txBody>
       </p:sp>
       <p:sp>
         <p:nvSpPr>
@@ -12207,7 +12364,7 @@
                 <a:ea typeface="Arial"/>
                 <a:cs typeface="Arial"/>
               </a:rPr>
-              <a:t>18</a:t>
+              <a:t>23</a:t>
             </a:r>
           </a:p>
         </p:txBody>
@@ -12244,6 +12401,10 @@
             <a:prstDash val="solid"/>
           </a:ln>
         </p:spPr>
+        <p:txBody xmlns:a="http://schemas.openxmlformats.org/drawingml/2006/main">
+          <a:bodyPr/>
+          <a:p/>
+        </p:txBody>
       </p:sp>
       <p:sp>
         <p:nvSpPr>
@@ -12472,6 +12633,10 @@
             <a:prstDash val="solid"/>
           </a:ln>
         </p:spPr>
+        <p:txBody xmlns:a="http://schemas.openxmlformats.org/drawingml/2006/main">
+          <a:bodyPr/>
+          <a:p/>
+        </p:txBody>
       </p:sp>
       <p:sp>
         <p:nvSpPr>
@@ -12930,6 +13095,699 @@
       </p:ext>
     </p:extLst>
   </p:cSld>
+</p:sld>
+</file>
+
+<file path=ppt/slides/slide19.xml><?xml version="1.0" encoding="utf-8"?>
+<p:sld xmlns:a="http://schemas.openxmlformats.org/drawingml/2006/main" xmlns:p="http://schemas.openxmlformats.org/presentationml/2006/main" xmlns:r="http://schemas.openxmlformats.org/officeDocument/2006/relationships">
+  <p:cSld>
+    <p:spTree>
+      <p:nvGrpSpPr>
+        <p:cNvPr id="1" name=""/>
+        <p:cNvGrpSpPr/>
+        <p:nvPr/>
+      </p:nvGrpSpPr>
+      <p:grpSpPr/>
+      <p:sp>
+        <p:nvSpPr>
+          <p:cNvPr id="2" name="TextBox 1"/>
+          <p:cNvSpPr txBox="1"/>
+          <p:nvPr/>
+        </p:nvSpPr>
+        <p:spPr>
+          <a:xfrm>
+            <a:off x="-2540000" y="-2540000"/>
+            <a:ext cx="508000" cy="127000"/>
+          </a:xfrm>
+          <a:prstGeom prst="rect">
+            <a:avLst/>
+          </a:prstGeom>
+          <a:noFill/>
+        </p:spPr>
+        <p:txBody>
+          <a:bodyPr wrap="square" lIns="0" rIns="0" tIns="0" bIns="0">
+            <a:spAutoFit/>
+          </a:bodyPr>
+          <a:lstStyle/>
+          <a:p>
+            <a:r>
+              <a:rPr sz="100" b="0">
+                <a:solidFill>
+                  <a:srgbClr val="5D6675"/>
+                </a:solidFill>
+                <a:latin typeface="Arial"/>
+              </a:rPr>
+              <a:t>GLOBAL2004</a:t>
+            </a:r>
+          </a:p>
+        </p:txBody>
+      </p:sp>
+      <p:sp>
+        <p:nvSpPr>
+          <p:cNvPr id="3" name="TextBox 2"/>
+          <p:cNvSpPr txBox="1"/>
+          <p:nvPr/>
+        </p:nvSpPr>
+        <p:spPr>
+          <a:xfrm>
+            <a:off x="609600" y="279400"/>
+            <a:ext cx="4762500" cy="203200"/>
+          </a:xfrm>
+          <a:prstGeom prst="rect">
+            <a:avLst/>
+          </a:prstGeom>
+          <a:noFill/>
+        </p:spPr>
+        <p:txBody>
+          <a:bodyPr wrap="square" lIns="0" rIns="0" tIns="0" bIns="0">
+            <a:spAutoFit/>
+          </a:bodyPr>
+          <a:lstStyle/>
+          <a:p>
+            <a:r>
+              <a:rPr sz="900" b="1">
+                <a:solidFill>
+                  <a:srgbClr val="3D8DFF"/>
+                </a:solidFill>
+                <a:latin typeface="Arial"/>
+              </a:rPr>
+              <a:t>EXTENSION DE RECHERCHE</a:t>
+            </a:r>
+          </a:p>
+        </p:txBody>
+      </p:sp>
+      <p:sp>
+        <p:nvSpPr>
+          <p:cNvPr id="4" name="TextBox 3"/>
+          <p:cNvSpPr txBox="1"/>
+          <p:nvPr/>
+        </p:nvSpPr>
+        <p:spPr>
+          <a:xfrm>
+            <a:off x="609600" y="558800"/>
+            <a:ext cx="10668000" cy="558800"/>
+          </a:xfrm>
+          <a:prstGeom prst="rect">
+            <a:avLst/>
+          </a:prstGeom>
+          <a:noFill/>
+        </p:spPr>
+        <p:txBody>
+          <a:bodyPr wrap="square" lIns="0" rIns="0" tIns="0" bIns="0">
+            <a:spAutoFit/>
+          </a:bodyPr>
+          <a:lstStyle/>
+          <a:p>
+            <a:r>
+              <a:rPr sz="2700" b="1">
+                <a:solidFill>
+                  <a:srgbClr val="111827"/>
+                </a:solidFill>
+                <a:latin typeface="Arial"/>
+              </a:rPr>
+              <a:t>Un troisième univers pour lever un doute d'identification</a:t>
+            </a:r>
+          </a:p>
+        </p:txBody>
+      </p:sp>
+      <p:sp>
+        <p:nvSpPr>
+          <p:cNvPr id="5" name="TextBox 4"/>
+          <p:cNvSpPr txBox="1"/>
+          <p:nvPr/>
+        </p:nvSpPr>
+        <p:spPr>
+          <a:xfrm>
+            <a:off x="11150600" y="342900"/>
+            <a:ext cx="431800" cy="228600"/>
+          </a:xfrm>
+          <a:prstGeom prst="rect">
+            <a:avLst/>
+          </a:prstGeom>
+          <a:noFill/>
+        </p:spPr>
+        <p:txBody>
+          <a:bodyPr wrap="square" lIns="0" rIns="0" tIns="0" bIns="0">
+            <a:spAutoFit/>
+          </a:bodyPr>
+          <a:lstStyle/>
+          <a:p>
+            <a:r>
+              <a:rPr sz="900" b="1">
+                <a:solidFill>
+                  <a:srgbClr val="5D6675"/>
+                </a:solidFill>
+                <a:latin typeface="Arial"/>
+              </a:rPr>
+              <a:t>14</a:t>
+            </a:r>
+          </a:p>
+        </p:txBody>
+      </p:sp>
+      <p:sp>
+        <p:nvSpPr>
+          <p:cNvPr id="6" name="Rounded Rectangle 5"/>
+          <p:cNvSpPr/>
+          <p:nvPr/>
+        </p:nvSpPr>
+        <p:spPr>
+          <a:xfrm>
+            <a:off x="609600" y="1422400"/>
+            <a:ext cx="5156200" cy="2540000"/>
+          </a:xfrm>
+          <a:prstGeom prst="roundRect">
+            <a:avLst>
+              <a:gd name="adj" fmla="val 3000"/>
+            </a:avLst>
+          </a:prstGeom>
+          <a:solidFill>
+            <a:srgbClr val="F3F4F6"/>
+          </a:solidFill>
+          <a:ln>
+            <a:noFill/>
+          </a:ln>
+          <a:effectLst/>
+        </p:spPr>
+        <p:style>
+          <a:lnRef idx="1">
+            <a:schemeClr val="accent1"/>
+          </a:lnRef>
+          <a:fillRef idx="3">
+            <a:schemeClr val="accent1"/>
+          </a:fillRef>
+          <a:effectRef idx="2">
+            <a:schemeClr val="accent1"/>
+          </a:effectRef>
+          <a:fontRef idx="minor">
+            <a:schemeClr val="lt1"/>
+          </a:fontRef>
+        </p:style>
+        <p:txBody>
+          <a:bodyPr rtlCol="0" anchor="ctr"/>
+          <a:lstStyle/>
+          <a:p>
+            <a:pPr algn="ctr"/>
+          </a:p>
+        </p:txBody>
+      </p:sp>
+      <p:sp>
+        <p:nvSpPr>
+          <p:cNvPr id="7" name="TextBox 6"/>
+          <p:cNvSpPr txBox="1"/>
+          <p:nvPr/>
+        </p:nvSpPr>
+        <p:spPr>
+          <a:xfrm>
+            <a:off x="889000" y="1676400"/>
+            <a:ext cx="4572000" cy="266700"/>
+          </a:xfrm>
+          <a:prstGeom prst="rect">
+            <a:avLst/>
+          </a:prstGeom>
+          <a:noFill/>
+        </p:spPr>
+        <p:txBody>
+          <a:bodyPr wrap="square" lIns="0" rIns="0" tIns="0" bIns="0">
+            <a:spAutoFit/>
+          </a:bodyPr>
+          <a:lstStyle/>
+          <a:p>
+            <a:r>
+              <a:rPr sz="1300" b="1">
+                <a:solidFill>
+                  <a:srgbClr val="111827"/>
+                </a:solidFill>
+                <a:latin typeface="Arial"/>
+              </a:rPr>
+              <a:t>etf_2017 — la contrainte domine</a:t>
+            </a:r>
+          </a:p>
+        </p:txBody>
+      </p:sp>
+      <p:sp>
+        <p:nvSpPr>
+          <p:cNvPr id="8" name="TextBox 7"/>
+          <p:cNvSpPr txBox="1"/>
+          <p:nvPr/>
+        </p:nvSpPr>
+        <p:spPr>
+          <a:xfrm>
+            <a:off x="889000" y="2108200"/>
+            <a:ext cx="2540000" cy="584200"/>
+          </a:xfrm>
+          <a:prstGeom prst="rect">
+            <a:avLst/>
+          </a:prstGeom>
+          <a:noFill/>
+        </p:spPr>
+        <p:txBody>
+          <a:bodyPr wrap="square" lIns="0" rIns="0" tIns="0" bIns="0">
+            <a:spAutoFit/>
+          </a:bodyPr>
+          <a:lstStyle/>
+          <a:p>
+            <a:r>
+              <a:rPr sz="3000" b="1">
+                <a:solidFill>
+                  <a:srgbClr val="B7433E"/>
+                </a:solidFill>
+                <a:latin typeface="Arial"/>
+              </a:rPr>
+              <a:t>1 / 248</a:t>
+            </a:r>
+          </a:p>
+        </p:txBody>
+      </p:sp>
+      <p:sp>
+        <p:nvSpPr>
+          <p:cNvPr id="9" name="TextBox 8"/>
+          <p:cNvSpPr txBox="1"/>
+          <p:nvPr/>
+        </p:nvSpPr>
+        <p:spPr>
+          <a:xfrm>
+            <a:off x="889000" y="2717800"/>
+            <a:ext cx="4572000" cy="1016000"/>
+          </a:xfrm>
+          <a:prstGeom prst="rect">
+            <a:avLst/>
+          </a:prstGeom>
+          <a:noFill/>
+        </p:spPr>
+        <p:txBody>
+          <a:bodyPr wrap="square" lIns="0" rIns="0" tIns="0" bIns="0">
+            <a:spAutoFit/>
+          </a:bodyPr>
+          <a:lstStyle/>
+          <a:p>
+            <a:pPr>
+              <a:lnSpc>
+                <a:spcPct val="130000"/>
+              </a:lnSpc>
+            </a:pPr>
+            <a:r>
+              <a:rPr sz="1200" b="0">
+                <a:solidFill>
+                  <a:srgbClr val="5D6675"/>
+                </a:solidFill>
+                <a:latin typeface="Arial"/>
+              </a:rPr>
+              <a:t>allocations distinctes de la variance minimale.</a:t>
+            </a:r>
+          </a:p>
+          <a:p>
+            <a:pPr>
+              <a:lnSpc>
+                <a:spcPct val="130000"/>
+              </a:lnSpc>
+            </a:pPr>
+            <a:r>
+              <a:rPr sz="1200" b="0">
+                <a:solidFill>
+                  <a:srgbClr val="5D6675"/>
+                </a:solidFill>
+                <a:latin typeface="Arial"/>
+              </a:rPr>
+              <a:t>À cinq actifs sous un plafond de 25 %, c'est la</a:t>
+            </a:r>
+          </a:p>
+          <a:p>
+            <a:pPr>
+              <a:lnSpc>
+                <a:spcPct val="130000"/>
+              </a:lnSpc>
+            </a:pPr>
+            <a:r>
+              <a:rPr sz="1200" b="0">
+                <a:solidFill>
+                  <a:srgbClr val="5D6675"/>
+                </a:solidFill>
+                <a:latin typeface="Arial"/>
+              </a:rPr>
+              <a:t>contrainte — non le modèle — qui choisit.</a:t>
+            </a:r>
+          </a:p>
+        </p:txBody>
+      </p:sp>
+      <p:sp>
+        <p:nvSpPr>
+          <p:cNvPr id="10" name="Rounded Rectangle 9"/>
+          <p:cNvSpPr/>
+          <p:nvPr/>
+        </p:nvSpPr>
+        <p:spPr>
+          <a:xfrm>
+            <a:off x="6045200" y="1422400"/>
+            <a:ext cx="5156200" cy="2540000"/>
+          </a:xfrm>
+          <a:prstGeom prst="roundRect">
+            <a:avLst>
+              <a:gd name="adj" fmla="val 3000"/>
+            </a:avLst>
+          </a:prstGeom>
+          <a:solidFill>
+            <a:srgbClr val="F3F4F6"/>
+          </a:solidFill>
+          <a:ln>
+            <a:noFill/>
+          </a:ln>
+          <a:effectLst/>
+        </p:spPr>
+        <p:style>
+          <a:lnRef idx="1">
+            <a:schemeClr val="accent1"/>
+          </a:lnRef>
+          <a:fillRef idx="3">
+            <a:schemeClr val="accent1"/>
+          </a:fillRef>
+          <a:effectRef idx="2">
+            <a:schemeClr val="accent1"/>
+          </a:effectRef>
+          <a:fontRef idx="minor">
+            <a:schemeClr val="lt1"/>
+          </a:fontRef>
+        </p:style>
+        <p:txBody>
+          <a:bodyPr rtlCol="0" anchor="ctr"/>
+          <a:lstStyle/>
+          <a:p>
+            <a:pPr algn="ctr"/>
+          </a:p>
+        </p:txBody>
+      </p:sp>
+      <p:sp>
+        <p:nvSpPr>
+          <p:cNvPr id="11" name="TextBox 10"/>
+          <p:cNvSpPr txBox="1"/>
+          <p:nvPr/>
+        </p:nvSpPr>
+        <p:spPr>
+          <a:xfrm>
+            <a:off x="6324600" y="1676400"/>
+            <a:ext cx="4572000" cy="266700"/>
+          </a:xfrm>
+          <a:prstGeom prst="rect">
+            <a:avLst/>
+          </a:prstGeom>
+          <a:noFill/>
+        </p:spPr>
+        <p:txBody>
+          <a:bodyPr wrap="square" lIns="0" rIns="0" tIns="0" bIns="0">
+            <a:spAutoFit/>
+          </a:bodyPr>
+          <a:lstStyle/>
+          <a:p>
+            <a:r>
+              <a:rPr sz="1300" b="1">
+                <a:solidFill>
+                  <a:srgbClr val="111827"/>
+                </a:solidFill>
+                <a:latin typeface="Arial"/>
+              </a:rPr>
+              <a:t>full_2021 — la covariance est biaisée</a:t>
+            </a:r>
+          </a:p>
+        </p:txBody>
+      </p:sp>
+      <p:sp>
+        <p:nvSpPr>
+          <p:cNvPr id="12" name="TextBox 11"/>
+          <p:cNvSpPr txBox="1"/>
+          <p:nvPr/>
+        </p:nvSpPr>
+        <p:spPr>
+          <a:xfrm>
+            <a:off x="6324600" y="2108200"/>
+            <a:ext cx="2540000" cy="584200"/>
+          </a:xfrm>
+          <a:prstGeom prst="rect">
+            <a:avLst/>
+          </a:prstGeom>
+          <a:noFill/>
+        </p:spPr>
+        <p:txBody>
+          <a:bodyPr wrap="square" lIns="0" rIns="0" tIns="0" bIns="0">
+            <a:spAutoFit/>
+          </a:bodyPr>
+          <a:lstStyle/>
+          <a:p>
+            <a:r>
+              <a:rPr sz="3000" b="1">
+                <a:solidFill>
+                  <a:srgbClr val="B7433E"/>
+                </a:solidFill>
+                <a:latin typeface="Arial"/>
+              </a:rPr>
+              <a:t>×19,1</a:t>
+            </a:r>
+          </a:p>
+        </p:txBody>
+      </p:sp>
+      <p:sp>
+        <p:nvSpPr>
+          <p:cNvPr id="13" name="TextBox 12"/>
+          <p:cNvSpPr txBox="1"/>
+          <p:nvPr/>
+        </p:nvSpPr>
+        <p:spPr>
+          <a:xfrm>
+            <a:off x="6324600" y="2717800"/>
+            <a:ext cx="4572000" cy="1016000"/>
+          </a:xfrm>
+          <a:prstGeom prst="rect">
+            <a:avLst/>
+          </a:prstGeom>
+          <a:noFill/>
+        </p:spPr>
+        <p:txBody>
+          <a:bodyPr wrap="square" lIns="0" rIns="0" tIns="0" bIns="0">
+            <a:spAutoFit/>
+          </a:bodyPr>
+          <a:lstStyle/>
+          <a:p>
+            <a:pPr>
+              <a:lnSpc>
+                <a:spcPct val="130000"/>
+              </a:lnSpc>
+            </a:pPr>
+            <a:r>
+              <a:rPr sz="1200" b="0">
+                <a:solidFill>
+                  <a:srgbClr val="5D6675"/>
+                </a:solidFill>
+                <a:latin typeface="Arial"/>
+              </a:rPr>
+              <a:t>corrélation décalée / contemporaine face au SPY.</a:t>
+            </a:r>
+          </a:p>
+          <a:p>
+            <a:pPr>
+              <a:lnSpc>
+                <a:spcPct val="130000"/>
+              </a:lnSpc>
+            </a:pPr>
+            <a:r>
+              <a:rPr sz="1200" b="0">
+                <a:solidFill>
+                  <a:srgbClr val="5D6675"/>
+                </a:solidFill>
+                <a:latin typeface="Arial"/>
+              </a:rPr>
+              <a:t>Séances non recouvrantes et prix figés</a:t>
+            </a:r>
+          </a:p>
+          <a:p>
+            <a:pPr>
+              <a:lnSpc>
+                <a:spcPct val="130000"/>
+              </a:lnSpc>
+            </a:pPr>
+            <a:r>
+              <a:rPr sz="1200" b="0">
+                <a:solidFill>
+                  <a:srgbClr val="5D6675"/>
+                </a:solidFill>
+                <a:latin typeface="Arial"/>
+              </a:rPr>
+              <a:t>(17,1 % de journées à rendement nul).</a:t>
+            </a:r>
+          </a:p>
+        </p:txBody>
+      </p:sp>
+      <p:sp>
+        <p:nvSpPr>
+          <p:cNvPr id="14" name="Rounded Rectangle 13"/>
+          <p:cNvSpPr/>
+          <p:nvPr/>
+        </p:nvSpPr>
+        <p:spPr>
+          <a:xfrm>
+            <a:off x="609600" y="4292600"/>
+            <a:ext cx="10591800" cy="1168400"/>
+          </a:xfrm>
+          <a:prstGeom prst="roundRect">
+            <a:avLst>
+              <a:gd name="adj" fmla="val 3000"/>
+            </a:avLst>
+          </a:prstGeom>
+          <a:solidFill>
+            <a:srgbClr val="FFF0D5"/>
+          </a:solidFill>
+          <a:ln>
+            <a:noFill/>
+          </a:ln>
+          <a:effectLst/>
+        </p:spPr>
+        <p:style>
+          <a:lnRef idx="1">
+            <a:schemeClr val="accent1"/>
+          </a:lnRef>
+          <a:fillRef idx="3">
+            <a:schemeClr val="accent1"/>
+          </a:fillRef>
+          <a:effectRef idx="2">
+            <a:schemeClr val="accent1"/>
+          </a:effectRef>
+          <a:fontRef idx="minor">
+            <a:schemeClr val="lt1"/>
+          </a:fontRef>
+        </p:style>
+        <p:txBody>
+          <a:bodyPr rtlCol="0" anchor="ctr"/>
+          <a:lstStyle/>
+          <a:p>
+            <a:pPr algn="ctr"/>
+          </a:p>
+        </p:txBody>
+      </p:sp>
+      <p:sp>
+        <p:nvSpPr>
+          <p:cNvPr id="15" name="TextBox 14"/>
+          <p:cNvSpPr txBox="1"/>
+          <p:nvPr/>
+        </p:nvSpPr>
+        <p:spPr>
+          <a:xfrm>
+            <a:off x="889000" y="4521200"/>
+            <a:ext cx="5080000" cy="228600"/>
+          </a:xfrm>
+          <a:prstGeom prst="rect">
+            <a:avLst/>
+          </a:prstGeom>
+          <a:noFill/>
+        </p:spPr>
+        <p:txBody>
+          <a:bodyPr wrap="square" lIns="0" rIns="0" tIns="0" bIns="0">
+            <a:spAutoFit/>
+          </a:bodyPr>
+          <a:lstStyle/>
+          <a:p>
+            <a:r>
+              <a:rPr sz="1050" b="1">
+                <a:solidFill>
+                  <a:srgbClr val="A86812"/>
+                </a:solidFill>
+                <a:latin typeface="Arial"/>
+              </a:rPr>
+              <a:t>Le doute que cela crée</a:t>
+            </a:r>
+          </a:p>
+        </p:txBody>
+      </p:sp>
+      <p:sp>
+        <p:nvSpPr>
+          <p:cNvPr id="16" name="TextBox 15"/>
+          <p:cNvSpPr txBox="1"/>
+          <p:nvPr/>
+        </p:nvSpPr>
+        <p:spPr>
+          <a:xfrm>
+            <a:off x="889000" y="4826000"/>
+            <a:ext cx="10033000" cy="508000"/>
+          </a:xfrm>
+          <a:prstGeom prst="rect">
+            <a:avLst/>
+          </a:prstGeom>
+          <a:noFill/>
+        </p:spPr>
+        <p:txBody>
+          <a:bodyPr wrap="square" lIns="0" rIns="0" tIns="0" bIns="0">
+            <a:spAutoFit/>
+          </a:bodyPr>
+          <a:lstStyle/>
+          <a:p>
+            <a:pPr>
+              <a:lnSpc>
+                <a:spcPct val="125000"/>
+              </a:lnSpc>
+            </a:pPr>
+            <a:r>
+              <a:rPr sz="1250" b="1">
+                <a:solidFill>
+                  <a:srgbClr val="111827"/>
+                </a:solidFill>
+                <a:latin typeface="Arial"/>
+              </a:rPr>
+              <a:t>Sur ces deux univers, impossible de distinguer « le modèle n'apporte rien »</a:t>
+            </a:r>
+          </a:p>
+          <a:p>
+            <a:pPr>
+              <a:lnSpc>
+                <a:spcPct val="125000"/>
+              </a:lnSpc>
+            </a:pPr>
+            <a:r>
+              <a:rPr sz="1250" b="1">
+                <a:solidFill>
+                  <a:srgbClr val="111827"/>
+                </a:solidFill>
+                <a:latin typeface="Arial"/>
+              </a:rPr>
+              <a:t>de « le dispositif ne lui permet pas de s'exprimer ».</a:t>
+            </a:r>
+          </a:p>
+        </p:txBody>
+      </p:sp>
+      <p:sp>
+        <p:nvSpPr>
+          <p:cNvPr id="17" name="TextBox 16"/>
+          <p:cNvSpPr txBox="1"/>
+          <p:nvPr/>
+        </p:nvSpPr>
+        <p:spPr>
+          <a:xfrm>
+            <a:off x="609600" y="5689600"/>
+            <a:ext cx="10591800" cy="431800"/>
+          </a:xfrm>
+          <a:prstGeom prst="rect">
+            <a:avLst/>
+          </a:prstGeom>
+          <a:noFill/>
+        </p:spPr>
+        <p:txBody>
+          <a:bodyPr wrap="square" lIns="0" rIns="0" tIns="0" bIns="0">
+            <a:spAutoFit/>
+          </a:bodyPr>
+          <a:lstStyle/>
+          <a:p>
+            <a:r>
+              <a:rPr sz="1150" b="0">
+                <a:solidFill>
+                  <a:srgbClr val="5D6675"/>
+                </a:solidFill>
+                <a:latin typeface="Arial"/>
+              </a:rPr>
+              <a:t>Réponse : un univers pré-enregistré et horodaté AVANT toute ingestion — dix ETF américains, 21,7 ans, à contrainte strictement identique.</a:t>
+            </a:r>
+          </a:p>
+        </p:txBody>
+      </p:sp>
+    </p:spTree>
+  </p:cSld>
+  <p:clrMapOvr>
+    <a:masterClrMapping/>
+  </p:clrMapOvr>
 </p:sld>
 </file>
 
@@ -13214,6 +14072,10 @@
             <a:prstDash val="solid"/>
           </a:ln>
         </p:spPr>
+        <p:txBody xmlns:a="http://schemas.openxmlformats.org/drawingml/2006/main">
+          <a:bodyPr/>
+          <a:p/>
+        </p:txBody>
       </p:sp>
       <p:sp>
         <p:nvSpPr>
@@ -13664,6 +14526,10 @@
             <a:prstDash val="solid"/>
           </a:ln>
         </p:spPr>
+        <p:txBody xmlns:a="http://schemas.openxmlformats.org/drawingml/2006/main">
+          <a:bodyPr/>
+          <a:p/>
+        </p:txBody>
       </p:sp>
       <p:sp>
         <p:nvSpPr>
@@ -13788,6 +14654,2767 @@
       </p:ext>
     </p:extLst>
   </p:cSld>
+</p:sld>
+</file>
+
+<file path=ppt/slides/slide20.xml><?xml version="1.0" encoding="utf-8"?>
+<p:sld xmlns:a="http://schemas.openxmlformats.org/drawingml/2006/main" xmlns:p="http://schemas.openxmlformats.org/presentationml/2006/main" xmlns:r="http://schemas.openxmlformats.org/officeDocument/2006/relationships">
+  <p:cSld>
+    <p:spTree>
+      <p:nvGrpSpPr>
+        <p:cNvPr id="1" name=""/>
+        <p:cNvGrpSpPr/>
+        <p:nvPr/>
+      </p:nvGrpSpPr>
+      <p:grpSpPr/>
+      <p:sp>
+        <p:nvSpPr>
+          <p:cNvPr id="2" name="TextBox 1"/>
+          <p:cNvSpPr txBox="1"/>
+          <p:nvPr/>
+        </p:nvSpPr>
+        <p:spPr>
+          <a:xfrm>
+            <a:off x="-2540000" y="-2540000"/>
+            <a:ext cx="508000" cy="127000"/>
+          </a:xfrm>
+          <a:prstGeom prst="rect">
+            <a:avLst/>
+          </a:prstGeom>
+          <a:noFill/>
+        </p:spPr>
+        <p:txBody>
+          <a:bodyPr wrap="square" lIns="0" rIns="0" tIns="0" bIns="0">
+            <a:spAutoFit/>
+          </a:bodyPr>
+          <a:lstStyle/>
+          <a:p>
+            <a:r>
+              <a:rPr sz="100" b="0">
+                <a:solidFill>
+                  <a:srgbClr val="5D6675"/>
+                </a:solidFill>
+                <a:latin typeface="Arial"/>
+              </a:rPr>
+              <a:t>GLOBAL2004</a:t>
+            </a:r>
+          </a:p>
+        </p:txBody>
+      </p:sp>
+      <p:sp>
+        <p:nvSpPr>
+          <p:cNvPr id="3" name="TextBox 2"/>
+          <p:cNvSpPr txBox="1"/>
+          <p:nvPr/>
+        </p:nvSpPr>
+        <p:spPr>
+          <a:xfrm>
+            <a:off x="609600" y="279400"/>
+            <a:ext cx="4762500" cy="203200"/>
+          </a:xfrm>
+          <a:prstGeom prst="rect">
+            <a:avLst/>
+          </a:prstGeom>
+          <a:noFill/>
+        </p:spPr>
+        <p:txBody>
+          <a:bodyPr wrap="square" lIns="0" rIns="0" tIns="0" bIns="0">
+            <a:spAutoFit/>
+          </a:bodyPr>
+          <a:lstStyle/>
+          <a:p>
+            <a:r>
+              <a:rPr sz="900" b="1">
+                <a:solidFill>
+                  <a:srgbClr val="3D8DFF"/>
+                </a:solidFill>
+                <a:latin typeface="Arial"/>
+              </a:rPr>
+              <a:t>EXPRESSIVITÉ</a:t>
+            </a:r>
+          </a:p>
+        </p:txBody>
+      </p:sp>
+      <p:sp>
+        <p:nvSpPr>
+          <p:cNvPr id="4" name="TextBox 3"/>
+          <p:cNvSpPr txBox="1"/>
+          <p:nvPr/>
+        </p:nvSpPr>
+        <p:spPr>
+          <a:xfrm>
+            <a:off x="609600" y="558800"/>
+            <a:ext cx="10668000" cy="558800"/>
+          </a:xfrm>
+          <a:prstGeom prst="rect">
+            <a:avLst/>
+          </a:prstGeom>
+          <a:noFill/>
+        </p:spPr>
+        <p:txBody>
+          <a:bodyPr wrap="square" lIns="0" rIns="0" tIns="0" bIns="0">
+            <a:spAutoFit/>
+          </a:bodyPr>
+          <a:lstStyle/>
+          <a:p>
+            <a:r>
+              <a:rPr sz="2700" b="1">
+                <a:solidFill>
+                  <a:srgbClr val="111827"/>
+                </a:solidFill>
+                <a:latin typeface="Arial"/>
+              </a:rPr>
+              <a:t>À contrainte identique, l'optimiseur peut enfin exprimer une vue</a:t>
+            </a:r>
+          </a:p>
+        </p:txBody>
+      </p:sp>
+      <p:sp>
+        <p:nvSpPr>
+          <p:cNvPr id="5" name="TextBox 4"/>
+          <p:cNvSpPr txBox="1"/>
+          <p:nvPr/>
+        </p:nvSpPr>
+        <p:spPr>
+          <a:xfrm>
+            <a:off x="11150600" y="342900"/>
+            <a:ext cx="431800" cy="228600"/>
+          </a:xfrm>
+          <a:prstGeom prst="rect">
+            <a:avLst/>
+          </a:prstGeom>
+          <a:noFill/>
+        </p:spPr>
+        <p:txBody>
+          <a:bodyPr wrap="square" lIns="0" rIns="0" tIns="0" bIns="0">
+            <a:spAutoFit/>
+          </a:bodyPr>
+          <a:lstStyle/>
+          <a:p>
+            <a:r>
+              <a:rPr sz="900" b="1">
+                <a:solidFill>
+                  <a:srgbClr val="5D6675"/>
+                </a:solidFill>
+                <a:latin typeface="Arial"/>
+              </a:rPr>
+              <a:t>15</a:t>
+            </a:r>
+          </a:p>
+        </p:txBody>
+      </p:sp>
+      <p:sp>
+        <p:nvSpPr>
+          <p:cNvPr id="6" name="Rounded Rectangle 5"/>
+          <p:cNvSpPr/>
+          <p:nvPr/>
+        </p:nvSpPr>
+        <p:spPr>
+          <a:xfrm>
+            <a:off x="609600" y="1371600"/>
+            <a:ext cx="6934200" cy="3175000"/>
+          </a:xfrm>
+          <a:prstGeom prst="roundRect">
+            <a:avLst>
+              <a:gd name="adj" fmla="val 3000"/>
+            </a:avLst>
+          </a:prstGeom>
+          <a:solidFill>
+            <a:srgbClr val="F3F4F6"/>
+          </a:solidFill>
+          <a:ln>
+            <a:noFill/>
+          </a:ln>
+          <a:effectLst/>
+        </p:spPr>
+        <p:style>
+          <a:lnRef idx="1">
+            <a:schemeClr val="accent1"/>
+          </a:lnRef>
+          <a:fillRef idx="3">
+            <a:schemeClr val="accent1"/>
+          </a:fillRef>
+          <a:effectRef idx="2">
+            <a:schemeClr val="accent1"/>
+          </a:effectRef>
+          <a:fontRef idx="minor">
+            <a:schemeClr val="lt1"/>
+          </a:fontRef>
+        </p:style>
+        <p:txBody>
+          <a:bodyPr rtlCol="0" anchor="ctr"/>
+          <a:lstStyle/>
+          <a:p>
+            <a:pPr algn="ctr"/>
+          </a:p>
+        </p:txBody>
+      </p:sp>
+      <p:pic>
+        <p:nvPicPr>
+          <p:cNvPr id="7" name="Picture 6" descr="global_2004_expressivite.png"/>
+          <p:cNvPicPr>
+            <a:picLocks noChangeAspect="1"/>
+          </p:cNvPicPr>
+          <p:nvPr/>
+        </p:nvPicPr>
+        <p:blipFill>
+          <a:blip r:embed="rId2"/>
+          <a:stretch>
+            <a:fillRect/>
+          </a:stretch>
+        </p:blipFill>
+        <p:spPr>
+          <a:xfrm>
+            <a:off x="762000" y="1651000"/>
+            <a:ext cx="6629400" cy="2641104"/>
+          </a:xfrm>
+          <a:prstGeom prst="rect">
+            <a:avLst/>
+          </a:prstGeom>
+        </p:spPr>
+      </p:pic>
+      <p:sp>
+        <p:nvSpPr>
+          <p:cNvPr id="8" name="TextBox 7"/>
+          <p:cNvSpPr txBox="1"/>
+          <p:nvPr/>
+        </p:nvSpPr>
+        <p:spPr>
+          <a:xfrm>
+            <a:off x="8001000" y="1549400"/>
+            <a:ext cx="3048000" cy="584200"/>
+          </a:xfrm>
+          <a:prstGeom prst="rect">
+            <a:avLst/>
+          </a:prstGeom>
+          <a:noFill/>
+        </p:spPr>
+        <p:txBody>
+          <a:bodyPr wrap="square" lIns="0" rIns="0" tIns="0" bIns="0">
+            <a:spAutoFit/>
+          </a:bodyPr>
+          <a:lstStyle/>
+          <a:p>
+            <a:r>
+              <a:rPr sz="3000" b="1">
+                <a:solidFill>
+                  <a:srgbClr val="B7433E"/>
+                </a:solidFill>
+                <a:latin typeface="Arial"/>
+              </a:rPr>
+              <a:t>1 / 248</a:t>
+            </a:r>
+          </a:p>
+        </p:txBody>
+      </p:sp>
+      <p:sp>
+        <p:nvSpPr>
+          <p:cNvPr id="9" name="TextBox 8"/>
+          <p:cNvSpPr txBox="1"/>
+          <p:nvPr/>
+        </p:nvSpPr>
+        <p:spPr>
+          <a:xfrm>
+            <a:off x="8001000" y="2133600"/>
+            <a:ext cx="3048000" cy="457200"/>
+          </a:xfrm>
+          <a:prstGeom prst="rect">
+            <a:avLst/>
+          </a:prstGeom>
+          <a:noFill/>
+        </p:spPr>
+        <p:txBody>
+          <a:bodyPr wrap="square" lIns="0" rIns="0" tIns="0" bIns="0">
+            <a:spAutoFit/>
+          </a:bodyPr>
+          <a:lstStyle/>
+          <a:p>
+            <a:pPr>
+              <a:lnSpc>
+                <a:spcPct val="115000"/>
+              </a:lnSpc>
+            </a:pPr>
+            <a:r>
+              <a:rPr sz="1200" b="0">
+                <a:solidFill>
+                  <a:srgbClr val="5D6675"/>
+                </a:solidFill>
+                <a:latin typeface="Arial"/>
+              </a:rPr>
+              <a:t>allocations distinctes</a:t>
+            </a:r>
+          </a:p>
+          <a:p>
+            <a:pPr>
+              <a:lnSpc>
+                <a:spcPct val="115000"/>
+              </a:lnSpc>
+            </a:pPr>
+            <a:r>
+              <a:rPr sz="1200" b="0">
+                <a:solidFill>
+                  <a:srgbClr val="5D6675"/>
+                </a:solidFill>
+                <a:latin typeface="Arial"/>
+              </a:rPr>
+              <a:t>sur etf_2017</a:t>
+            </a:r>
+          </a:p>
+        </p:txBody>
+      </p:sp>
+      <p:sp>
+        <p:nvSpPr>
+          <p:cNvPr id="10" name="TextBox 9"/>
+          <p:cNvSpPr txBox="1"/>
+          <p:nvPr/>
+        </p:nvSpPr>
+        <p:spPr>
+          <a:xfrm>
+            <a:off x="8001000" y="2870200"/>
+            <a:ext cx="3048000" cy="584200"/>
+          </a:xfrm>
+          <a:prstGeom prst="rect">
+            <a:avLst/>
+          </a:prstGeom>
+          <a:noFill/>
+        </p:spPr>
+        <p:txBody>
+          <a:bodyPr wrap="square" lIns="0" rIns="0" tIns="0" bIns="0">
+            <a:spAutoFit/>
+          </a:bodyPr>
+          <a:lstStyle/>
+          <a:p>
+            <a:r>
+              <a:rPr sz="3000" b="1">
+                <a:solidFill>
+                  <a:srgbClr val="0F766E"/>
+                </a:solidFill>
+                <a:latin typeface="Arial"/>
+              </a:rPr>
+              <a:t>249 / 249</a:t>
+            </a:r>
+          </a:p>
+        </p:txBody>
+      </p:sp>
+      <p:sp>
+        <p:nvSpPr>
+          <p:cNvPr id="11" name="TextBox 10"/>
+          <p:cNvSpPr txBox="1"/>
+          <p:nvPr/>
+        </p:nvSpPr>
+        <p:spPr>
+          <a:xfrm>
+            <a:off x="8001000" y="3454400"/>
+            <a:ext cx="3048000" cy="457200"/>
+          </a:xfrm>
+          <a:prstGeom prst="rect">
+            <a:avLst/>
+          </a:prstGeom>
+          <a:noFill/>
+        </p:spPr>
+        <p:txBody>
+          <a:bodyPr wrap="square" lIns="0" rIns="0" tIns="0" bIns="0">
+            <a:spAutoFit/>
+          </a:bodyPr>
+          <a:lstStyle/>
+          <a:p>
+            <a:pPr>
+              <a:lnSpc>
+                <a:spcPct val="115000"/>
+              </a:lnSpc>
+            </a:pPr>
+            <a:r>
+              <a:rPr sz="1200" b="0">
+                <a:solidFill>
+                  <a:srgbClr val="5D6675"/>
+                </a:solidFill>
+                <a:latin typeface="Arial"/>
+              </a:rPr>
+              <a:t>allocations distinctes</a:t>
+            </a:r>
+          </a:p>
+          <a:p>
+            <a:pPr>
+              <a:lnSpc>
+                <a:spcPct val="115000"/>
+              </a:lnSpc>
+            </a:pPr>
+            <a:r>
+              <a:rPr sz="1200" b="0">
+                <a:solidFill>
+                  <a:srgbClr val="5D6675"/>
+                </a:solidFill>
+                <a:latin typeface="Arial"/>
+              </a:rPr>
+              <a:t>sur global_2004</a:t>
+            </a:r>
+          </a:p>
+        </p:txBody>
+      </p:sp>
+      <p:sp>
+        <p:nvSpPr>
+          <p:cNvPr id="12" name="Rounded Rectangle 11"/>
+          <p:cNvSpPr/>
+          <p:nvPr/>
+        </p:nvSpPr>
+        <p:spPr>
+          <a:xfrm>
+            <a:off x="609600" y="4800600"/>
+            <a:ext cx="10591800" cy="711200"/>
+          </a:xfrm>
+          <a:prstGeom prst="roundRect">
+            <a:avLst>
+              <a:gd name="adj" fmla="val 3000"/>
+            </a:avLst>
+          </a:prstGeom>
+          <a:solidFill>
+            <a:srgbClr val="FFF0D5"/>
+          </a:solidFill>
+          <a:ln>
+            <a:noFill/>
+          </a:ln>
+          <a:effectLst/>
+        </p:spPr>
+        <p:style>
+          <a:lnRef idx="1">
+            <a:schemeClr val="accent1"/>
+          </a:lnRef>
+          <a:fillRef idx="3">
+            <a:schemeClr val="accent1"/>
+          </a:fillRef>
+          <a:effectRef idx="2">
+            <a:schemeClr val="accent1"/>
+          </a:effectRef>
+          <a:fontRef idx="minor">
+            <a:schemeClr val="lt1"/>
+          </a:fontRef>
+        </p:style>
+        <p:txBody>
+          <a:bodyPr rtlCol="0" anchor="ctr"/>
+          <a:lstStyle/>
+          <a:p>
+            <a:pPr algn="ctr"/>
+          </a:p>
+        </p:txBody>
+      </p:sp>
+      <p:sp>
+        <p:nvSpPr>
+          <p:cNvPr id="13" name="TextBox 12"/>
+          <p:cNvSpPr txBox="1"/>
+          <p:nvPr/>
+        </p:nvSpPr>
+        <p:spPr>
+          <a:xfrm>
+            <a:off x="889000" y="5003800"/>
+            <a:ext cx="10033000" cy="330200"/>
+          </a:xfrm>
+          <a:prstGeom prst="rect">
+            <a:avLst/>
+          </a:prstGeom>
+          <a:noFill/>
+        </p:spPr>
+        <p:txBody>
+          <a:bodyPr wrap="square" lIns="0" rIns="0" tIns="0" bIns="0">
+            <a:spAutoFit/>
+          </a:bodyPr>
+          <a:lstStyle/>
+          <a:p>
+            <a:r>
+              <a:rPr sz="1250" b="1">
+                <a:solidFill>
+                  <a:srgbClr val="111827"/>
+                </a:solidFill>
+                <a:latin typeface="Arial"/>
+              </a:rPr>
+              <a:t>Même plafond de 25 %, mêmes coûts, même moteur — READY sur 10 critères de préparation.</a:t>
+            </a:r>
+          </a:p>
+        </p:txBody>
+      </p:sp>
+      <p:sp>
+        <p:nvSpPr>
+          <p:cNvPr id="14" name="TextBox 13"/>
+          <p:cNvSpPr txBox="1"/>
+          <p:nvPr/>
+        </p:nvSpPr>
+        <p:spPr>
+          <a:xfrm>
+            <a:off x="609600" y="5740400"/>
+            <a:ext cx="10591800" cy="431800"/>
+          </a:xfrm>
+          <a:prstGeom prst="rect">
+            <a:avLst/>
+          </a:prstGeom>
+          <a:noFill/>
+        </p:spPr>
+        <p:txBody>
+          <a:bodyPr wrap="square" lIns="0" rIns="0" tIns="0" bIns="0">
+            <a:spAutoFit/>
+          </a:bodyPr>
+          <a:lstStyle/>
+          <a:p>
+            <a:r>
+              <a:rPr sz="1150" b="0">
+                <a:solidFill>
+                  <a:srgbClr val="5D6675"/>
+                </a:solidFill>
+                <a:latin typeface="Arial"/>
+              </a:rPr>
+              <a:t>C'est la condition nécessaire pour qu'un test de modèle ait un sens : sans elle, un résultat négatif ne s'interprète pas.</a:t>
+            </a:r>
+          </a:p>
+        </p:txBody>
+      </p:sp>
+    </p:spTree>
+  </p:cSld>
+  <p:clrMapOvr>
+    <a:masterClrMapping/>
+  </p:clrMapOvr>
+</p:sld>
+</file>
+
+<file path=ppt/slides/slide21.xml><?xml version="1.0" encoding="utf-8"?>
+<p:sld xmlns:a="http://schemas.openxmlformats.org/drawingml/2006/main" xmlns:p="http://schemas.openxmlformats.org/presentationml/2006/main" xmlns:r="http://schemas.openxmlformats.org/officeDocument/2006/relationships">
+  <p:cSld>
+    <p:spTree>
+      <p:nvGrpSpPr>
+        <p:cNvPr id="1" name=""/>
+        <p:cNvGrpSpPr/>
+        <p:nvPr/>
+      </p:nvGrpSpPr>
+      <p:grpSpPr/>
+      <p:sp>
+        <p:nvSpPr>
+          <p:cNvPr id="2" name="TextBox 1"/>
+          <p:cNvSpPr txBox="1"/>
+          <p:nvPr/>
+        </p:nvSpPr>
+        <p:spPr>
+          <a:xfrm>
+            <a:off x="-2540000" y="-2540000"/>
+            <a:ext cx="508000" cy="127000"/>
+          </a:xfrm>
+          <a:prstGeom prst="rect">
+            <a:avLst/>
+          </a:prstGeom>
+          <a:noFill/>
+        </p:spPr>
+        <p:txBody>
+          <a:bodyPr wrap="square" lIns="0" rIns="0" tIns="0" bIns="0">
+            <a:spAutoFit/>
+          </a:bodyPr>
+          <a:lstStyle/>
+          <a:p>
+            <a:r>
+              <a:rPr sz="100" b="0">
+                <a:solidFill>
+                  <a:srgbClr val="5D6675"/>
+                </a:solidFill>
+                <a:latin typeface="Arial"/>
+              </a:rPr>
+              <a:t>GLOBAL2004</a:t>
+            </a:r>
+          </a:p>
+        </p:txBody>
+      </p:sp>
+      <p:sp>
+        <p:nvSpPr>
+          <p:cNvPr id="3" name="TextBox 2"/>
+          <p:cNvSpPr txBox="1"/>
+          <p:nvPr/>
+        </p:nvSpPr>
+        <p:spPr>
+          <a:xfrm>
+            <a:off x="609600" y="279400"/>
+            <a:ext cx="4762500" cy="203200"/>
+          </a:xfrm>
+          <a:prstGeom prst="rect">
+            <a:avLst/>
+          </a:prstGeom>
+          <a:noFill/>
+        </p:spPr>
+        <p:txBody>
+          <a:bodyPr wrap="square" lIns="0" rIns="0" tIns="0" bIns="0">
+            <a:spAutoFit/>
+          </a:bodyPr>
+          <a:lstStyle/>
+          <a:p>
+            <a:r>
+              <a:rPr sz="900" b="1">
+                <a:solidFill>
+                  <a:srgbClr val="3D8DFF"/>
+                </a:solidFill>
+                <a:latin typeface="Arial"/>
+              </a:rPr>
+              <a:t>TEST ÉQUITABLE — Q1</a:t>
+            </a:r>
+          </a:p>
+        </p:txBody>
+      </p:sp>
+      <p:sp>
+        <p:nvSpPr>
+          <p:cNvPr id="4" name="TextBox 3"/>
+          <p:cNvSpPr txBox="1"/>
+          <p:nvPr/>
+        </p:nvSpPr>
+        <p:spPr>
+          <a:xfrm>
+            <a:off x="609600" y="558800"/>
+            <a:ext cx="10668000" cy="558800"/>
+          </a:xfrm>
+          <a:prstGeom prst="rect">
+            <a:avLst/>
+          </a:prstGeom>
+          <a:noFill/>
+        </p:spPr>
+        <p:txBody>
+          <a:bodyPr wrap="square" lIns="0" rIns="0" tIns="0" bIns="0">
+            <a:spAutoFit/>
+          </a:bodyPr>
+          <a:lstStyle/>
+          <a:p>
+            <a:r>
+              <a:rPr sz="2700" b="1">
+                <a:solidFill>
+                  <a:srgbClr val="111827"/>
+                </a:solidFill>
+                <a:latin typeface="Arial"/>
+              </a:rPr>
+              <a:t>La couche de régimes ne bat pas le comparateur classique</a:t>
+            </a:r>
+          </a:p>
+        </p:txBody>
+      </p:sp>
+      <p:sp>
+        <p:nvSpPr>
+          <p:cNvPr id="5" name="TextBox 4"/>
+          <p:cNvSpPr txBox="1"/>
+          <p:nvPr/>
+        </p:nvSpPr>
+        <p:spPr>
+          <a:xfrm>
+            <a:off x="11150600" y="342900"/>
+            <a:ext cx="431800" cy="228600"/>
+          </a:xfrm>
+          <a:prstGeom prst="rect">
+            <a:avLst/>
+          </a:prstGeom>
+          <a:noFill/>
+        </p:spPr>
+        <p:txBody>
+          <a:bodyPr wrap="square" lIns="0" rIns="0" tIns="0" bIns="0">
+            <a:spAutoFit/>
+          </a:bodyPr>
+          <a:lstStyle/>
+          <a:p>
+            <a:r>
+              <a:rPr sz="900" b="1">
+                <a:solidFill>
+                  <a:srgbClr val="5D6675"/>
+                </a:solidFill>
+                <a:latin typeface="Arial"/>
+              </a:rPr>
+              <a:t>16</a:t>
+            </a:r>
+          </a:p>
+        </p:txBody>
+      </p:sp>
+      <p:sp>
+        <p:nvSpPr>
+          <p:cNvPr id="6" name="TextBox 5"/>
+          <p:cNvSpPr txBox="1"/>
+          <p:nvPr/>
+        </p:nvSpPr>
+        <p:spPr>
+          <a:xfrm>
+            <a:off x="609600" y="1498600"/>
+            <a:ext cx="2540000" cy="584200"/>
+          </a:xfrm>
+          <a:prstGeom prst="rect">
+            <a:avLst/>
+          </a:prstGeom>
+          <a:noFill/>
+        </p:spPr>
+        <p:txBody>
+          <a:bodyPr wrap="square" lIns="0" rIns="0" tIns="0" bIns="0">
+            <a:spAutoFit/>
+          </a:bodyPr>
+          <a:lstStyle/>
+          <a:p>
+            <a:r>
+              <a:rPr sz="3000" b="1">
+                <a:solidFill>
+                  <a:srgbClr val="0F766E"/>
+                </a:solidFill>
+                <a:latin typeface="Arial"/>
+              </a:rPr>
+              <a:t>0,9785</a:t>
+            </a:r>
+          </a:p>
+        </p:txBody>
+      </p:sp>
+      <p:sp>
+        <p:nvSpPr>
+          <p:cNvPr id="7" name="TextBox 6"/>
+          <p:cNvSpPr txBox="1"/>
+          <p:nvPr/>
+        </p:nvSpPr>
+        <p:spPr>
+          <a:xfrm>
+            <a:off x="609600" y="2082800"/>
+            <a:ext cx="2540000" cy="457200"/>
+          </a:xfrm>
+          <a:prstGeom prst="rect">
+            <a:avLst/>
+          </a:prstGeom>
+          <a:noFill/>
+        </p:spPr>
+        <p:txBody>
+          <a:bodyPr wrap="square" lIns="0" rIns="0" tIns="0" bIns="0">
+            <a:spAutoFit/>
+          </a:bodyPr>
+          <a:lstStyle/>
+          <a:p>
+            <a:pPr>
+              <a:lnSpc>
+                <a:spcPct val="115000"/>
+              </a:lnSpc>
+            </a:pPr>
+            <a:r>
+              <a:rPr sz="1200" b="0">
+                <a:solidFill>
+                  <a:srgbClr val="5D6675"/>
+                </a:solidFill>
+                <a:latin typeface="Arial"/>
+              </a:rPr>
+              <a:t>max_sharpe</a:t>
+            </a:r>
+          </a:p>
+          <a:p>
+            <a:pPr>
+              <a:lnSpc>
+                <a:spcPct val="115000"/>
+              </a:lnSpc>
+            </a:pPr>
+            <a:r>
+              <a:rPr sz="1200" b="0">
+                <a:solidFill>
+                  <a:srgbClr val="5D6675"/>
+                </a:solidFill>
+                <a:latin typeface="Arial"/>
+              </a:rPr>
+              <a:t>comparateur pré-spécifié</a:t>
+            </a:r>
+          </a:p>
+        </p:txBody>
+      </p:sp>
+      <p:sp>
+        <p:nvSpPr>
+          <p:cNvPr id="8" name="TextBox 7"/>
+          <p:cNvSpPr txBox="1"/>
+          <p:nvPr/>
+        </p:nvSpPr>
+        <p:spPr>
+          <a:xfrm>
+            <a:off x="3403600" y="1498600"/>
+            <a:ext cx="2540000" cy="584200"/>
+          </a:xfrm>
+          <a:prstGeom prst="rect">
+            <a:avLst/>
+          </a:prstGeom>
+          <a:noFill/>
+        </p:spPr>
+        <p:txBody>
+          <a:bodyPr wrap="square" lIns="0" rIns="0" tIns="0" bIns="0">
+            <a:spAutoFit/>
+          </a:bodyPr>
+          <a:lstStyle/>
+          <a:p>
+            <a:r>
+              <a:rPr sz="3000" b="1">
+                <a:solidFill>
+                  <a:srgbClr val="3D8DFF"/>
+                </a:solidFill>
+                <a:latin typeface="Arial"/>
+              </a:rPr>
+              <a:t>0,8923</a:t>
+            </a:r>
+          </a:p>
+        </p:txBody>
+      </p:sp>
+      <p:sp>
+        <p:nvSpPr>
+          <p:cNvPr id="9" name="TextBox 8"/>
+          <p:cNvSpPr txBox="1"/>
+          <p:nvPr/>
+        </p:nvSpPr>
+        <p:spPr>
+          <a:xfrm>
+            <a:off x="3403600" y="2082800"/>
+            <a:ext cx="2540000" cy="457200"/>
+          </a:xfrm>
+          <a:prstGeom prst="rect">
+            <a:avLst/>
+          </a:prstGeom>
+          <a:noFill/>
+        </p:spPr>
+        <p:txBody>
+          <a:bodyPr wrap="square" lIns="0" rIns="0" tIns="0" bIns="0">
+            <a:spAutoFit/>
+          </a:bodyPr>
+          <a:lstStyle/>
+          <a:p>
+            <a:pPr>
+              <a:lnSpc>
+                <a:spcPct val="115000"/>
+              </a:lnSpc>
+            </a:pPr>
+            <a:r>
+              <a:rPr sz="1200" b="0">
+                <a:solidFill>
+                  <a:srgbClr val="5D6675"/>
+                </a:solidFill>
+                <a:latin typeface="Arial"/>
+              </a:rPr>
+              <a:t>regime_conditional</a:t>
+            </a:r>
+          </a:p>
+          <a:p>
+            <a:pPr>
+              <a:lnSpc>
+                <a:spcPct val="115000"/>
+              </a:lnSpc>
+            </a:pPr>
+            <a:r>
+              <a:rPr sz="1200" b="0">
+                <a:solidFill>
+                  <a:srgbClr val="5D6675"/>
+                </a:solidFill>
+                <a:latin typeface="Arial"/>
+              </a:rPr>
+              <a:t>stratégie candidate</a:t>
+            </a:r>
+          </a:p>
+        </p:txBody>
+      </p:sp>
+      <p:sp>
+        <p:nvSpPr>
+          <p:cNvPr id="10" name="TextBox 9"/>
+          <p:cNvSpPr txBox="1"/>
+          <p:nvPr/>
+        </p:nvSpPr>
+        <p:spPr>
+          <a:xfrm>
+            <a:off x="6197600" y="1498600"/>
+            <a:ext cx="2540000" cy="584200"/>
+          </a:xfrm>
+          <a:prstGeom prst="rect">
+            <a:avLst/>
+          </a:prstGeom>
+          <a:noFill/>
+        </p:spPr>
+        <p:txBody>
+          <a:bodyPr wrap="square" lIns="0" rIns="0" tIns="0" bIns="0">
+            <a:spAutoFit/>
+          </a:bodyPr>
+          <a:lstStyle/>
+          <a:p>
+            <a:r>
+              <a:rPr sz="3000" b="1">
+                <a:solidFill>
+                  <a:srgbClr val="B7433E"/>
+                </a:solidFill>
+                <a:latin typeface="Arial"/>
+              </a:rPr>
+              <a:t>−0,0862</a:t>
+            </a:r>
+          </a:p>
+        </p:txBody>
+      </p:sp>
+      <p:sp>
+        <p:nvSpPr>
+          <p:cNvPr id="11" name="TextBox 10"/>
+          <p:cNvSpPr txBox="1"/>
+          <p:nvPr/>
+        </p:nvSpPr>
+        <p:spPr>
+          <a:xfrm>
+            <a:off x="6197600" y="2082800"/>
+            <a:ext cx="2540000" cy="457200"/>
+          </a:xfrm>
+          <a:prstGeom prst="rect">
+            <a:avLst/>
+          </a:prstGeom>
+          <a:noFill/>
+        </p:spPr>
+        <p:txBody>
+          <a:bodyPr wrap="square" lIns="0" rIns="0" tIns="0" bIns="0">
+            <a:spAutoFit/>
+          </a:bodyPr>
+          <a:lstStyle/>
+          <a:p>
+            <a:pPr>
+              <a:lnSpc>
+                <a:spcPct val="115000"/>
+              </a:lnSpc>
+            </a:pPr>
+            <a:r>
+              <a:rPr sz="1200" b="0">
+                <a:solidFill>
+                  <a:srgbClr val="5D6675"/>
+                </a:solidFill>
+                <a:latin typeface="Arial"/>
+              </a:rPr>
+              <a:t>écart de Sharpe net</a:t>
+            </a:r>
+          </a:p>
+          <a:p>
+            <a:pPr>
+              <a:lnSpc>
+                <a:spcPct val="115000"/>
+              </a:lnSpc>
+            </a:pPr>
+            <a:r>
+              <a:rPr sz="1200" b="0">
+                <a:solidFill>
+                  <a:srgbClr val="5D6675"/>
+                </a:solidFill>
+                <a:latin typeface="Arial"/>
+              </a:rPr>
+              <a:t>observé</a:t>
+            </a:r>
+          </a:p>
+        </p:txBody>
+      </p:sp>
+      <p:sp>
+        <p:nvSpPr>
+          <p:cNvPr id="12" name="TextBox 11"/>
+          <p:cNvSpPr txBox="1"/>
+          <p:nvPr/>
+        </p:nvSpPr>
+        <p:spPr>
+          <a:xfrm>
+            <a:off x="8991600" y="1498600"/>
+            <a:ext cx="2209800" cy="584200"/>
+          </a:xfrm>
+          <a:prstGeom prst="rect">
+            <a:avLst/>
+          </a:prstGeom>
+          <a:noFill/>
+        </p:spPr>
+        <p:txBody>
+          <a:bodyPr wrap="square" lIns="0" rIns="0" tIns="0" bIns="0">
+            <a:spAutoFit/>
+          </a:bodyPr>
+          <a:lstStyle/>
+          <a:p>
+            <a:r>
+              <a:rPr sz="3000" b="1">
+                <a:solidFill>
+                  <a:srgbClr val="5D6675"/>
+                </a:solidFill>
+                <a:latin typeface="Arial"/>
+              </a:rPr>
+              <a:t>0,860</a:t>
+            </a:r>
+          </a:p>
+        </p:txBody>
+      </p:sp>
+      <p:sp>
+        <p:nvSpPr>
+          <p:cNvPr id="13" name="TextBox 12"/>
+          <p:cNvSpPr txBox="1"/>
+          <p:nvPr/>
+        </p:nvSpPr>
+        <p:spPr>
+          <a:xfrm>
+            <a:off x="8991600" y="2082800"/>
+            <a:ext cx="2209800" cy="457200"/>
+          </a:xfrm>
+          <a:prstGeom prst="rect">
+            <a:avLst/>
+          </a:prstGeom>
+          <a:noFill/>
+        </p:spPr>
+        <p:txBody>
+          <a:bodyPr wrap="square" lIns="0" rIns="0" tIns="0" bIns="0">
+            <a:spAutoFit/>
+          </a:bodyPr>
+          <a:lstStyle/>
+          <a:p>
+            <a:pPr>
+              <a:lnSpc>
+                <a:spcPct val="115000"/>
+              </a:lnSpc>
+            </a:pPr>
+            <a:r>
+              <a:rPr sz="1200" b="0">
+                <a:solidFill>
+                  <a:srgbClr val="5D6675"/>
+                </a:solidFill>
+                <a:latin typeface="Arial"/>
+              </a:rPr>
+              <a:t>valeur p unilatérale</a:t>
+            </a:r>
+          </a:p>
+          <a:p>
+            <a:pPr>
+              <a:lnSpc>
+                <a:spcPct val="115000"/>
+              </a:lnSpc>
+            </a:pPr>
+            <a:r>
+              <a:rPr sz="1200" b="0">
+                <a:solidFill>
+                  <a:srgbClr val="5D6675"/>
+                </a:solidFill>
+                <a:latin typeface="Arial"/>
+              </a:rPr>
+              <a:t>test pairé</a:t>
+            </a:r>
+          </a:p>
+        </p:txBody>
+      </p:sp>
+      <p:sp>
+        <p:nvSpPr>
+          <p:cNvPr id="14" name="Rounded Rectangle 13"/>
+          <p:cNvSpPr/>
+          <p:nvPr/>
+        </p:nvSpPr>
+        <p:spPr>
+          <a:xfrm>
+            <a:off x="609600" y="3048000"/>
+            <a:ext cx="5156200" cy="2235200"/>
+          </a:xfrm>
+          <a:prstGeom prst="roundRect">
+            <a:avLst>
+              <a:gd name="adj" fmla="val 3000"/>
+            </a:avLst>
+          </a:prstGeom>
+          <a:solidFill>
+            <a:srgbClr val="F3F4F6"/>
+          </a:solidFill>
+          <a:ln>
+            <a:noFill/>
+          </a:ln>
+          <a:effectLst/>
+        </p:spPr>
+        <p:style>
+          <a:lnRef idx="1">
+            <a:schemeClr val="accent1"/>
+          </a:lnRef>
+          <a:fillRef idx="3">
+            <a:schemeClr val="accent1"/>
+          </a:fillRef>
+          <a:effectRef idx="2">
+            <a:schemeClr val="accent1"/>
+          </a:effectRef>
+          <a:fontRef idx="minor">
+            <a:schemeClr val="lt1"/>
+          </a:fontRef>
+        </p:style>
+        <p:txBody>
+          <a:bodyPr rtlCol="0" anchor="ctr"/>
+          <a:lstStyle/>
+          <a:p>
+            <a:pPr algn="ctr"/>
+          </a:p>
+        </p:txBody>
+      </p:sp>
+      <p:sp>
+        <p:nvSpPr>
+          <p:cNvPr id="15" name="TextBox 14"/>
+          <p:cNvSpPr txBox="1"/>
+          <p:nvPr/>
+        </p:nvSpPr>
+        <p:spPr>
+          <a:xfrm>
+            <a:off x="889000" y="3276600"/>
+            <a:ext cx="4572000" cy="254000"/>
+          </a:xfrm>
+          <a:prstGeom prst="rect">
+            <a:avLst/>
+          </a:prstGeom>
+          <a:noFill/>
+        </p:spPr>
+        <p:txBody>
+          <a:bodyPr wrap="square" lIns="0" rIns="0" tIns="0" bIns="0">
+            <a:spAutoFit/>
+          </a:bodyPr>
+          <a:lstStyle/>
+          <a:p>
+            <a:r>
+              <a:rPr sz="1250" b="1">
+                <a:solidFill>
+                  <a:srgbClr val="111827"/>
+                </a:solidFill>
+                <a:latin typeface="Arial"/>
+              </a:rPr>
+              <a:t>Ce que les coûts n'expliquent pas</a:t>
+            </a:r>
+          </a:p>
+        </p:txBody>
+      </p:sp>
+      <p:sp>
+        <p:nvSpPr>
+          <p:cNvPr id="16" name="TextBox 15"/>
+          <p:cNvSpPr txBox="1"/>
+          <p:nvPr/>
+        </p:nvSpPr>
+        <p:spPr>
+          <a:xfrm>
+            <a:off x="889000" y="3657600"/>
+            <a:ext cx="4648200" cy="1422400"/>
+          </a:xfrm>
+          <a:prstGeom prst="rect">
+            <a:avLst/>
+          </a:prstGeom>
+          <a:noFill/>
+        </p:spPr>
+        <p:txBody>
+          <a:bodyPr wrap="square" lIns="0" rIns="0" tIns="0" bIns="0">
+            <a:spAutoFit/>
+          </a:bodyPr>
+          <a:lstStyle/>
+          <a:p>
+            <a:pPr>
+              <a:lnSpc>
+                <a:spcPct val="130000"/>
+              </a:lnSpc>
+            </a:pPr>
+            <a:r>
+              <a:rPr sz="1200" b="0">
+                <a:solidFill>
+                  <a:srgbClr val="5D6675"/>
+                </a:solidFill>
+                <a:latin typeface="Arial"/>
+              </a:rPr>
+              <a:t>Le Sharpe BRUT était déjà inférieur : 0,9080 contre 0,9820.</a:t>
+            </a:r>
+          </a:p>
+          <a:p>
+            <a:pPr>
+              <a:lnSpc>
+                <a:spcPct val="130000"/>
+              </a:lnSpc>
+            </a:pPr>
+            <a:r>
+              <a:rPr sz="1200" b="0">
+                <a:solidFill>
+                  <a:srgbClr val="5D6675"/>
+                </a:solidFill>
+                <a:latin typeface="Arial"/>
+              </a:rPr>
+              <a:t/>
+            </a:r>
+          </a:p>
+          <a:p>
+            <a:pPr>
+              <a:lnSpc>
+                <a:spcPct val="130000"/>
+              </a:lnSpc>
+            </a:pPr>
+            <a:r>
+              <a:rPr sz="1200" b="0">
+                <a:solidFill>
+                  <a:srgbClr val="5D6675"/>
+                </a:solidFill>
+                <a:latin typeface="Arial"/>
+              </a:rPr>
+              <a:t>Ce n'est donc pas un signal informatif annulé par les frais de transaction.</a:t>
+            </a:r>
+          </a:p>
+        </p:txBody>
+      </p:sp>
+      <p:sp>
+        <p:nvSpPr>
+          <p:cNvPr id="17" name="Rounded Rectangle 16"/>
+          <p:cNvSpPr/>
+          <p:nvPr/>
+        </p:nvSpPr>
+        <p:spPr>
+          <a:xfrm>
+            <a:off x="6045200" y="3048000"/>
+            <a:ext cx="5156200" cy="2235200"/>
+          </a:xfrm>
+          <a:prstGeom prst="roundRect">
+            <a:avLst>
+              <a:gd name="adj" fmla="val 3000"/>
+            </a:avLst>
+          </a:prstGeom>
+          <a:solidFill>
+            <a:srgbClr val="F3F4F6"/>
+          </a:solidFill>
+          <a:ln>
+            <a:noFill/>
+          </a:ln>
+          <a:effectLst/>
+        </p:spPr>
+        <p:style>
+          <a:lnRef idx="1">
+            <a:schemeClr val="accent1"/>
+          </a:lnRef>
+          <a:fillRef idx="3">
+            <a:schemeClr val="accent1"/>
+          </a:fillRef>
+          <a:effectRef idx="2">
+            <a:schemeClr val="accent1"/>
+          </a:effectRef>
+          <a:fontRef idx="minor">
+            <a:schemeClr val="lt1"/>
+          </a:fontRef>
+        </p:style>
+        <p:txBody>
+          <a:bodyPr rtlCol="0" anchor="ctr"/>
+          <a:lstStyle/>
+          <a:p>
+            <a:pPr algn="ctr"/>
+          </a:p>
+        </p:txBody>
+      </p:sp>
+      <p:sp>
+        <p:nvSpPr>
+          <p:cNvPr id="18" name="TextBox 17"/>
+          <p:cNvSpPr txBox="1"/>
+          <p:nvPr/>
+        </p:nvSpPr>
+        <p:spPr>
+          <a:xfrm>
+            <a:off x="6324600" y="3276600"/>
+            <a:ext cx="4572000" cy="254000"/>
+          </a:xfrm>
+          <a:prstGeom prst="rect">
+            <a:avLst/>
+          </a:prstGeom>
+          <a:noFill/>
+        </p:spPr>
+        <p:txBody>
+          <a:bodyPr wrap="square" lIns="0" rIns="0" tIns="0" bIns="0">
+            <a:spAutoFit/>
+          </a:bodyPr>
+          <a:lstStyle/>
+          <a:p>
+            <a:r>
+              <a:rPr sz="1250" b="1">
+                <a:solidFill>
+                  <a:srgbClr val="111827"/>
+                </a:solidFill>
+                <a:latin typeface="Arial"/>
+              </a:rPr>
+              <a:t>Ce que le Sharpe seul masquerait</a:t>
+            </a:r>
+          </a:p>
+        </p:txBody>
+      </p:sp>
+      <p:sp>
+        <p:nvSpPr>
+          <p:cNvPr id="19" name="TextBox 18"/>
+          <p:cNvSpPr txBox="1"/>
+          <p:nvPr/>
+        </p:nvSpPr>
+        <p:spPr>
+          <a:xfrm>
+            <a:off x="6324600" y="3657600"/>
+            <a:ext cx="4648200" cy="1422400"/>
+          </a:xfrm>
+          <a:prstGeom prst="rect">
+            <a:avLst/>
+          </a:prstGeom>
+          <a:noFill/>
+        </p:spPr>
+        <p:txBody>
+          <a:bodyPr wrap="square" lIns="0" rIns="0" tIns="0" bIns="0">
+            <a:spAutoFit/>
+          </a:bodyPr>
+          <a:lstStyle/>
+          <a:p>
+            <a:pPr>
+              <a:lnSpc>
+                <a:spcPct val="130000"/>
+              </a:lnSpc>
+            </a:pPr>
+            <a:r>
+              <a:rPr sz="1200" b="0">
+                <a:solidFill>
+                  <a:srgbClr val="5D6675"/>
+                </a:solidFill>
+                <a:latin typeface="Arial"/>
+              </a:rPr>
+              <a:t>Rotation 4,3× supérieure (0,122 contre 0,028).</a:t>
+            </a:r>
+          </a:p>
+          <a:p>
+            <a:pPr>
+              <a:lnSpc>
+                <a:spcPct val="130000"/>
+              </a:lnSpc>
+            </a:pPr>
+            <a:r>
+              <a:rPr sz="1200" b="0">
+                <a:solidFill>
+                  <a:srgbClr val="5D6675"/>
+                </a:solidFill>
+                <a:latin typeface="Arial"/>
+              </a:rPr>
+              <a:t/>
+            </a:r>
+          </a:p>
+          <a:p>
+            <a:pPr>
+              <a:lnSpc>
+                <a:spcPct val="130000"/>
+              </a:lnSpc>
+            </a:pPr>
+            <a:r>
+              <a:rPr sz="1200" b="0">
+                <a:solidFill>
+                  <a:srgbClr val="5D6675"/>
+                </a:solidFill>
+                <a:latin typeface="Arial"/>
+              </a:rPr>
+              <a:t>Mais perte maximale MOINDRE : −24,22 % contre −25,27 % — la stratégie ne perd pas sur toutes les dimensions.</a:t>
+            </a:r>
+          </a:p>
+        </p:txBody>
+      </p:sp>
+      <p:sp>
+        <p:nvSpPr>
+          <p:cNvPr id="20" name="TextBox 19"/>
+          <p:cNvSpPr txBox="1"/>
+          <p:nvPr/>
+        </p:nvSpPr>
+        <p:spPr>
+          <a:xfrm>
+            <a:off x="609600" y="5588000"/>
+            <a:ext cx="10591800" cy="431800"/>
+          </a:xfrm>
+          <a:prstGeom prst="rect">
+            <a:avLst/>
+          </a:prstGeom>
+          <a:noFill/>
+        </p:spPr>
+        <p:txBody>
+          <a:bodyPr wrap="square" lIns="0" rIns="0" tIns="0" bIns="0">
+            <a:spAutoFit/>
+          </a:bodyPr>
+          <a:lstStyle/>
+          <a:p>
+            <a:r>
+              <a:rPr sz="1150" b="0">
+                <a:solidFill>
+                  <a:srgbClr val="5D6675"/>
+                </a:solidFill>
+                <a:latin typeface="Arial"/>
+              </a:rPr>
+              <a:t>Les deux verdicts pré-enregistrés sont négatifs. L'intervalle contient zéro : aucune supériorité n'est établie, dans aucun sens.</a:t>
+            </a:r>
+          </a:p>
+        </p:txBody>
+      </p:sp>
+    </p:spTree>
+  </p:cSld>
+  <p:clrMapOvr>
+    <a:masterClrMapping/>
+  </p:clrMapOvr>
+</p:sld>
+</file>
+
+<file path=ppt/slides/slide22.xml><?xml version="1.0" encoding="utf-8"?>
+<p:sld xmlns:a="http://schemas.openxmlformats.org/drawingml/2006/main" xmlns:p="http://schemas.openxmlformats.org/presentationml/2006/main" xmlns:r="http://schemas.openxmlformats.org/officeDocument/2006/relationships">
+  <p:cSld>
+    <p:spTree>
+      <p:nvGrpSpPr>
+        <p:cNvPr id="1" name=""/>
+        <p:cNvGrpSpPr/>
+        <p:nvPr/>
+      </p:nvGrpSpPr>
+      <p:grpSpPr/>
+      <p:sp>
+        <p:nvSpPr>
+          <p:cNvPr id="2" name="TextBox 1"/>
+          <p:cNvSpPr txBox="1"/>
+          <p:nvPr/>
+        </p:nvSpPr>
+        <p:spPr>
+          <a:xfrm>
+            <a:off x="-2540000" y="-2540000"/>
+            <a:ext cx="508000" cy="127000"/>
+          </a:xfrm>
+          <a:prstGeom prst="rect">
+            <a:avLst/>
+          </a:prstGeom>
+          <a:noFill/>
+        </p:spPr>
+        <p:txBody>
+          <a:bodyPr wrap="square" lIns="0" rIns="0" tIns="0" bIns="0">
+            <a:spAutoFit/>
+          </a:bodyPr>
+          <a:lstStyle/>
+          <a:p>
+            <a:r>
+              <a:rPr sz="100" b="0">
+                <a:solidFill>
+                  <a:srgbClr val="5D6675"/>
+                </a:solidFill>
+                <a:latin typeface="Arial"/>
+              </a:rPr>
+              <a:t>GLOBAL2004</a:t>
+            </a:r>
+          </a:p>
+        </p:txBody>
+      </p:sp>
+      <p:sp>
+        <p:nvSpPr>
+          <p:cNvPr id="3" name="TextBox 2"/>
+          <p:cNvSpPr txBox="1"/>
+          <p:nvPr/>
+        </p:nvSpPr>
+        <p:spPr>
+          <a:xfrm>
+            <a:off x="609600" y="279400"/>
+            <a:ext cx="4762500" cy="203200"/>
+          </a:xfrm>
+          <a:prstGeom prst="rect">
+            <a:avLst/>
+          </a:prstGeom>
+          <a:noFill/>
+        </p:spPr>
+        <p:txBody>
+          <a:bodyPr wrap="square" lIns="0" rIns="0" tIns="0" bIns="0">
+            <a:spAutoFit/>
+          </a:bodyPr>
+          <a:lstStyle/>
+          <a:p>
+            <a:r>
+              <a:rPr sz="900" b="1">
+                <a:solidFill>
+                  <a:srgbClr val="3D8DFF"/>
+                </a:solidFill>
+                <a:latin typeface="Arial"/>
+              </a:rPr>
+              <a:t>CORRECTION — Q2</a:t>
+            </a:r>
+          </a:p>
+        </p:txBody>
+      </p:sp>
+      <p:sp>
+        <p:nvSpPr>
+          <p:cNvPr id="4" name="TextBox 3"/>
+          <p:cNvSpPr txBox="1"/>
+          <p:nvPr/>
+        </p:nvSpPr>
+        <p:spPr>
+          <a:xfrm>
+            <a:off x="609600" y="558800"/>
+            <a:ext cx="10668000" cy="558800"/>
+          </a:xfrm>
+          <a:prstGeom prst="rect">
+            <a:avLst/>
+          </a:prstGeom>
+          <a:noFill/>
+        </p:spPr>
+        <p:txBody>
+          <a:bodyPr wrap="square" lIns="0" rIns="0" tIns="0" bIns="0">
+            <a:spAutoFit/>
+          </a:bodyPr>
+          <a:lstStyle/>
+          <a:p>
+            <a:r>
+              <a:rPr sz="2700" b="1">
+                <a:solidFill>
+                  <a:srgbClr val="111827"/>
+                </a:solidFill>
+                <a:latin typeface="Arial"/>
+              </a:rPr>
+              <a:t>Le meilleur candidat brut est séduisant — et refusé</a:t>
+            </a:r>
+          </a:p>
+        </p:txBody>
+      </p:sp>
+      <p:sp>
+        <p:nvSpPr>
+          <p:cNvPr id="5" name="TextBox 4"/>
+          <p:cNvSpPr txBox="1"/>
+          <p:nvPr/>
+        </p:nvSpPr>
+        <p:spPr>
+          <a:xfrm>
+            <a:off x="11150600" y="342900"/>
+            <a:ext cx="431800" cy="228600"/>
+          </a:xfrm>
+          <a:prstGeom prst="rect">
+            <a:avLst/>
+          </a:prstGeom>
+          <a:noFill/>
+        </p:spPr>
+        <p:txBody>
+          <a:bodyPr wrap="square" lIns="0" rIns="0" tIns="0" bIns="0">
+            <a:spAutoFit/>
+          </a:bodyPr>
+          <a:lstStyle/>
+          <a:p>
+            <a:r>
+              <a:rPr sz="900" b="1">
+                <a:solidFill>
+                  <a:srgbClr val="5D6675"/>
+                </a:solidFill>
+                <a:latin typeface="Arial"/>
+              </a:rPr>
+              <a:t>17</a:t>
+            </a:r>
+          </a:p>
+        </p:txBody>
+      </p:sp>
+      <p:sp>
+        <p:nvSpPr>
+          <p:cNvPr id="6" name="Rounded Rectangle 5"/>
+          <p:cNvSpPr/>
+          <p:nvPr/>
+        </p:nvSpPr>
+        <p:spPr>
+          <a:xfrm>
+            <a:off x="609600" y="1371600"/>
+            <a:ext cx="6934200" cy="3352800"/>
+          </a:xfrm>
+          <a:prstGeom prst="roundRect">
+            <a:avLst>
+              <a:gd name="adj" fmla="val 3000"/>
+            </a:avLst>
+          </a:prstGeom>
+          <a:solidFill>
+            <a:srgbClr val="F3F4F6"/>
+          </a:solidFill>
+          <a:ln>
+            <a:noFill/>
+          </a:ln>
+          <a:effectLst/>
+        </p:spPr>
+        <p:style>
+          <a:lnRef idx="1">
+            <a:schemeClr val="accent1"/>
+          </a:lnRef>
+          <a:fillRef idx="3">
+            <a:schemeClr val="accent1"/>
+          </a:fillRef>
+          <a:effectRef idx="2">
+            <a:schemeClr val="accent1"/>
+          </a:effectRef>
+          <a:fontRef idx="minor">
+            <a:schemeClr val="lt1"/>
+          </a:fontRef>
+        </p:style>
+        <p:txBody>
+          <a:bodyPr rtlCol="0" anchor="ctr"/>
+          <a:lstStyle/>
+          <a:p>
+            <a:pPr algn="ctr"/>
+          </a:p>
+        </p:txBody>
+      </p:sp>
+      <p:pic>
+        <p:nvPicPr>
+          <p:cNvPr id="7" name="Picture 6" descr="global_2004_correction.png"/>
+          <p:cNvPicPr>
+            <a:picLocks noChangeAspect="1"/>
+          </p:cNvPicPr>
+          <p:nvPr/>
+        </p:nvPicPr>
+        <p:blipFill>
+          <a:blip r:embed="rId2"/>
+          <a:stretch>
+            <a:fillRect/>
+          </a:stretch>
+        </p:blipFill>
+        <p:spPr>
+          <a:xfrm>
+            <a:off x="736600" y="1549400"/>
+            <a:ext cx="6680200" cy="3559053"/>
+          </a:xfrm>
+          <a:prstGeom prst="rect">
+            <a:avLst/>
+          </a:prstGeom>
+        </p:spPr>
+      </p:pic>
+      <p:sp>
+        <p:nvSpPr>
+          <p:cNvPr id="8" name="TextBox 7"/>
+          <p:cNvSpPr txBox="1"/>
+          <p:nvPr/>
+        </p:nvSpPr>
+        <p:spPr>
+          <a:xfrm>
+            <a:off x="8001000" y="1473200"/>
+            <a:ext cx="3048000" cy="584200"/>
+          </a:xfrm>
+          <a:prstGeom prst="rect">
+            <a:avLst/>
+          </a:prstGeom>
+          <a:noFill/>
+        </p:spPr>
+        <p:txBody>
+          <a:bodyPr wrap="square" lIns="0" rIns="0" tIns="0" bIns="0">
+            <a:spAutoFit/>
+          </a:bodyPr>
+          <a:lstStyle/>
+          <a:p>
+            <a:r>
+              <a:rPr sz="3000" b="1">
+                <a:solidFill>
+                  <a:srgbClr val="B7433E"/>
+                </a:solidFill>
+                <a:latin typeface="Arial"/>
+              </a:rPr>
+              <a:t>+0,093</a:t>
+            </a:r>
+          </a:p>
+        </p:txBody>
+      </p:sp>
+      <p:sp>
+        <p:nvSpPr>
+          <p:cNvPr id="9" name="TextBox 8"/>
+          <p:cNvSpPr txBox="1"/>
+          <p:nvPr/>
+        </p:nvSpPr>
+        <p:spPr>
+          <a:xfrm>
+            <a:off x="8001000" y="2057400"/>
+            <a:ext cx="3048000" cy="457200"/>
+          </a:xfrm>
+          <a:prstGeom prst="rect">
+            <a:avLst/>
+          </a:prstGeom>
+          <a:noFill/>
+        </p:spPr>
+        <p:txBody>
+          <a:bodyPr wrap="square" lIns="0" rIns="0" tIns="0" bIns="0">
+            <a:spAutoFit/>
+          </a:bodyPr>
+          <a:lstStyle/>
+          <a:p>
+            <a:pPr>
+              <a:lnSpc>
+                <a:spcPct val="115000"/>
+              </a:lnSpc>
+            </a:pPr>
+            <a:r>
+              <a:rPr sz="1200" b="0">
+                <a:solidFill>
+                  <a:srgbClr val="5D6675"/>
+                </a:solidFill>
+                <a:latin typeface="Arial"/>
+              </a:rPr>
+              <a:t>meilleur écart BRUT</a:t>
+            </a:r>
+          </a:p>
+          <a:p>
+            <a:pPr>
+              <a:lnSpc>
+                <a:spcPct val="115000"/>
+              </a:lnSpc>
+            </a:pPr>
+            <a:r>
+              <a:rPr sz="1200" b="0">
+                <a:solidFill>
+                  <a:srgbClr val="5D6675"/>
+                </a:solidFill>
+                <a:latin typeface="Arial"/>
+              </a:rPr>
+              <a:t>sur 240 configurations</a:t>
+            </a:r>
+          </a:p>
+        </p:txBody>
+      </p:sp>
+      <p:sp>
+        <p:nvSpPr>
+          <p:cNvPr id="10" name="TextBox 9"/>
+          <p:cNvSpPr txBox="1"/>
+          <p:nvPr/>
+        </p:nvSpPr>
+        <p:spPr>
+          <a:xfrm>
+            <a:off x="8001000" y="2692400"/>
+            <a:ext cx="3048000" cy="584200"/>
+          </a:xfrm>
+          <a:prstGeom prst="rect">
+            <a:avLst/>
+          </a:prstGeom>
+          <a:noFill/>
+        </p:spPr>
+        <p:txBody>
+          <a:bodyPr wrap="square" lIns="0" rIns="0" tIns="0" bIns="0">
+            <a:spAutoFit/>
+          </a:bodyPr>
+          <a:lstStyle/>
+          <a:p>
+            <a:r>
+              <a:rPr sz="3000" b="1">
+                <a:solidFill>
+                  <a:srgbClr val="0F766E"/>
+                </a:solidFill>
+                <a:latin typeface="Arial"/>
+              </a:rPr>
+              <a:t>0,905 / 0,866</a:t>
+            </a:r>
+          </a:p>
+        </p:txBody>
+      </p:sp>
+      <p:sp>
+        <p:nvSpPr>
+          <p:cNvPr id="11" name="TextBox 10"/>
+          <p:cNvSpPr txBox="1"/>
+          <p:nvPr/>
+        </p:nvSpPr>
+        <p:spPr>
+          <a:xfrm>
+            <a:off x="8001000" y="3276600"/>
+            <a:ext cx="3048000" cy="457200"/>
+          </a:xfrm>
+          <a:prstGeom prst="rect">
+            <a:avLst/>
+          </a:prstGeom>
+          <a:noFill/>
+        </p:spPr>
+        <p:txBody>
+          <a:bodyPr wrap="square" lIns="0" rIns="0" tIns="0" bIns="0">
+            <a:spAutoFit/>
+          </a:bodyPr>
+          <a:lstStyle/>
+          <a:p>
+            <a:pPr>
+              <a:lnSpc>
+                <a:spcPct val="115000"/>
+              </a:lnSpc>
+            </a:pPr>
+            <a:r>
+              <a:rPr sz="1200" b="0">
+                <a:solidFill>
+                  <a:srgbClr val="5D6675"/>
+                </a:solidFill>
+                <a:latin typeface="Arial"/>
+              </a:rPr>
+              <a:t>White RC / Hansen SPA</a:t>
+            </a:r>
+          </a:p>
+          <a:p>
+            <a:pPr>
+              <a:lnSpc>
+                <a:spcPct val="115000"/>
+              </a:lnSpc>
+            </a:pPr>
+            <a:r>
+              <a:rPr sz="1200" b="0">
+                <a:solidFill>
+                  <a:srgbClr val="5D6675"/>
+                </a:solidFill>
+                <a:latin typeface="Arial"/>
+              </a:rPr>
+              <a:t>aucun ne rejette</a:t>
+            </a:r>
+          </a:p>
+        </p:txBody>
+      </p:sp>
+      <p:sp>
+        <p:nvSpPr>
+          <p:cNvPr id="12" name="Rounded Rectangle 11"/>
+          <p:cNvSpPr/>
+          <p:nvPr/>
+        </p:nvSpPr>
+        <p:spPr>
+          <a:xfrm>
+            <a:off x="7899400" y="3886200"/>
+            <a:ext cx="3302000" cy="838200"/>
+          </a:xfrm>
+          <a:prstGeom prst="roundRect">
+            <a:avLst>
+              <a:gd name="adj" fmla="val 3000"/>
+            </a:avLst>
+          </a:prstGeom>
+          <a:solidFill>
+            <a:srgbClr val="FFF0D5"/>
+          </a:solidFill>
+          <a:ln>
+            <a:noFill/>
+          </a:ln>
+          <a:effectLst/>
+        </p:spPr>
+        <p:style>
+          <a:lnRef idx="1">
+            <a:schemeClr val="accent1"/>
+          </a:lnRef>
+          <a:fillRef idx="3">
+            <a:schemeClr val="accent1"/>
+          </a:fillRef>
+          <a:effectRef idx="2">
+            <a:schemeClr val="accent1"/>
+          </a:effectRef>
+          <a:fontRef idx="minor">
+            <a:schemeClr val="lt1"/>
+          </a:fontRef>
+        </p:style>
+        <p:txBody>
+          <a:bodyPr rtlCol="0" anchor="ctr"/>
+          <a:lstStyle/>
+          <a:p>
+            <a:pPr algn="ctr"/>
+          </a:p>
+        </p:txBody>
+      </p:sp>
+      <p:sp>
+        <p:nvSpPr>
+          <p:cNvPr id="13" name="TextBox 12"/>
+          <p:cNvSpPr txBox="1"/>
+          <p:nvPr/>
+        </p:nvSpPr>
+        <p:spPr>
+          <a:xfrm>
+            <a:off x="8128000" y="4038600"/>
+            <a:ext cx="2870200" cy="203200"/>
+          </a:xfrm>
+          <a:prstGeom prst="rect">
+            <a:avLst/>
+          </a:prstGeom>
+          <a:noFill/>
+        </p:spPr>
+        <p:txBody>
+          <a:bodyPr wrap="square" lIns="0" rIns="0" tIns="0" bIns="0">
+            <a:spAutoFit/>
+          </a:bodyPr>
+          <a:lstStyle/>
+          <a:p>
+            <a:r>
+              <a:rPr sz="1050" b="1">
+                <a:solidFill>
+                  <a:srgbClr val="A86812"/>
+                </a:solidFill>
+                <a:latin typeface="Arial"/>
+              </a:rPr>
+              <a:t>Pourquoi il est refusé</a:t>
+            </a:r>
+          </a:p>
+        </p:txBody>
+      </p:sp>
+      <p:sp>
+        <p:nvSpPr>
+          <p:cNvPr id="14" name="TextBox 13"/>
+          <p:cNvSpPr txBox="1"/>
+          <p:nvPr/>
+        </p:nvSpPr>
+        <p:spPr>
+          <a:xfrm>
+            <a:off x="8128000" y="4292600"/>
+            <a:ext cx="2870200" cy="381000"/>
+          </a:xfrm>
+          <a:prstGeom prst="rect">
+            <a:avLst/>
+          </a:prstGeom>
+          <a:noFill/>
+        </p:spPr>
+        <p:txBody>
+          <a:bodyPr wrap="square" lIns="0" rIns="0" tIns="0" bIns="0">
+            <a:spAutoFit/>
+          </a:bodyPr>
+          <a:lstStyle/>
+          <a:p>
+            <a:pPr>
+              <a:lnSpc>
+                <a:spcPct val="120000"/>
+              </a:lnSpc>
+            </a:pPr>
+            <a:r>
+              <a:rPr sz="1050" b="1">
+                <a:solidFill>
+                  <a:srgbClr val="111827"/>
+                </a:solidFill>
+                <a:latin typeface="Arial"/>
+              </a:rPr>
+              <a:t>C'est le maximum d'une recherche de 240 configurations. Seules 17 dépassent la référence.</a:t>
+            </a:r>
+          </a:p>
+        </p:txBody>
+      </p:sp>
+      <p:sp>
+        <p:nvSpPr>
+          <p:cNvPr id="15" name="TextBox 14"/>
+          <p:cNvSpPr txBox="1"/>
+          <p:nvPr/>
+        </p:nvSpPr>
+        <p:spPr>
+          <a:xfrm>
+            <a:off x="609600" y="5054600"/>
+            <a:ext cx="10591800" cy="762000"/>
+          </a:xfrm>
+          <a:prstGeom prst="rect">
+            <a:avLst/>
+          </a:prstGeom>
+          <a:noFill/>
+        </p:spPr>
+        <p:txBody>
+          <a:bodyPr wrap="square" lIns="0" rIns="0" tIns="0" bIns="0">
+            <a:spAutoFit/>
+          </a:bodyPr>
+          <a:lstStyle/>
+          <a:p>
+            <a:pPr>
+              <a:lnSpc>
+                <a:spcPct val="130000"/>
+              </a:lnSpc>
+            </a:pPr>
+            <a:r>
+              <a:rPr sz="1250" b="1">
+                <a:solidFill>
+                  <a:srgbClr val="111827"/>
+                </a:solidFill>
+                <a:latin typeface="Arial"/>
+              </a:rPr>
+              <a:t>Cité seul, ce +0,093 aurait fait un titre défendable — supérieur en valeur absolue à l'écart de Q1, et de sens inverse.</a:t>
+            </a:r>
+          </a:p>
+          <a:p>
+            <a:pPr>
+              <a:lnSpc>
+                <a:spcPct val="130000"/>
+              </a:lnSpc>
+            </a:pPr>
+            <a:r>
+              <a:rPr sz="1250" b="1">
+                <a:solidFill>
+                  <a:srgbClr val="111827"/>
+                </a:solidFill>
+                <a:latin typeface="Arial"/>
+              </a:rPr>
+              <a:t>La correction pour tests multiples est exactement ce qui l'en empêche.</a:t>
+            </a:r>
+          </a:p>
+        </p:txBody>
+      </p:sp>
+    </p:spTree>
+  </p:cSld>
+  <p:clrMapOvr>
+    <a:masterClrMapping/>
+  </p:clrMapOvr>
+</p:sld>
+</file>
+
+<file path=ppt/slides/slide23.xml><?xml version="1.0" encoding="utf-8"?>
+<p:sld xmlns:a="http://schemas.openxmlformats.org/drawingml/2006/main" xmlns:p="http://schemas.openxmlformats.org/presentationml/2006/main" xmlns:r="http://schemas.openxmlformats.org/officeDocument/2006/relationships">
+  <p:cSld>
+    <p:spTree>
+      <p:nvGrpSpPr>
+        <p:cNvPr id="1" name=""/>
+        <p:cNvGrpSpPr/>
+        <p:nvPr/>
+      </p:nvGrpSpPr>
+      <p:grpSpPr/>
+      <p:sp>
+        <p:nvSpPr>
+          <p:cNvPr id="2" name="TextBox 1"/>
+          <p:cNvSpPr txBox="1"/>
+          <p:nvPr/>
+        </p:nvSpPr>
+        <p:spPr>
+          <a:xfrm>
+            <a:off x="-2540000" y="-2540000"/>
+            <a:ext cx="508000" cy="127000"/>
+          </a:xfrm>
+          <a:prstGeom prst="rect">
+            <a:avLst/>
+          </a:prstGeom>
+          <a:noFill/>
+        </p:spPr>
+        <p:txBody>
+          <a:bodyPr wrap="square" lIns="0" rIns="0" tIns="0" bIns="0">
+            <a:spAutoFit/>
+          </a:bodyPr>
+          <a:lstStyle/>
+          <a:p>
+            <a:r>
+              <a:rPr sz="100" b="0">
+                <a:solidFill>
+                  <a:srgbClr val="5D6675"/>
+                </a:solidFill>
+                <a:latin typeface="Arial"/>
+              </a:rPr>
+              <a:t>GLOBAL2004</a:t>
+            </a:r>
+          </a:p>
+        </p:txBody>
+      </p:sp>
+      <p:sp>
+        <p:nvSpPr>
+          <p:cNvPr id="3" name="TextBox 2"/>
+          <p:cNvSpPr txBox="1"/>
+          <p:nvPr/>
+        </p:nvSpPr>
+        <p:spPr>
+          <a:xfrm>
+            <a:off x="609600" y="279400"/>
+            <a:ext cx="4762500" cy="203200"/>
+          </a:xfrm>
+          <a:prstGeom prst="rect">
+            <a:avLst/>
+          </a:prstGeom>
+          <a:noFill/>
+        </p:spPr>
+        <p:txBody>
+          <a:bodyPr wrap="square" lIns="0" rIns="0" tIns="0" bIns="0">
+            <a:spAutoFit/>
+          </a:bodyPr>
+          <a:lstStyle/>
+          <a:p>
+            <a:r>
+              <a:rPr sz="900" b="1">
+                <a:solidFill>
+                  <a:srgbClr val="3D8DFF"/>
+                </a:solidFill>
+                <a:latin typeface="Arial"/>
+              </a:rPr>
+              <a:t>SYNTHÈSE</a:t>
+            </a:r>
+          </a:p>
+        </p:txBody>
+      </p:sp>
+      <p:sp>
+        <p:nvSpPr>
+          <p:cNvPr id="4" name="TextBox 3"/>
+          <p:cNvSpPr txBox="1"/>
+          <p:nvPr/>
+        </p:nvSpPr>
+        <p:spPr>
+          <a:xfrm>
+            <a:off x="609600" y="558800"/>
+            <a:ext cx="10668000" cy="558800"/>
+          </a:xfrm>
+          <a:prstGeom prst="rect">
+            <a:avLst/>
+          </a:prstGeom>
+          <a:noFill/>
+        </p:spPr>
+        <p:txBody>
+          <a:bodyPr wrap="square" lIns="0" rIns="0" tIns="0" bIns="0">
+            <a:spAutoFit/>
+          </a:bodyPr>
+          <a:lstStyle/>
+          <a:p>
+            <a:r>
+              <a:rPr sz="2700" b="1">
+                <a:solidFill>
+                  <a:srgbClr val="111827"/>
+                </a:solidFill>
+                <a:latin typeface="Arial"/>
+              </a:rPr>
+              <a:t>Trois résultats à ne pas confondre</a:t>
+            </a:r>
+          </a:p>
+        </p:txBody>
+      </p:sp>
+      <p:sp>
+        <p:nvSpPr>
+          <p:cNvPr id="5" name="TextBox 4"/>
+          <p:cNvSpPr txBox="1"/>
+          <p:nvPr/>
+        </p:nvSpPr>
+        <p:spPr>
+          <a:xfrm>
+            <a:off x="11150600" y="342900"/>
+            <a:ext cx="431800" cy="228600"/>
+          </a:xfrm>
+          <a:prstGeom prst="rect">
+            <a:avLst/>
+          </a:prstGeom>
+          <a:noFill/>
+        </p:spPr>
+        <p:txBody>
+          <a:bodyPr wrap="square" lIns="0" rIns="0" tIns="0" bIns="0">
+            <a:spAutoFit/>
+          </a:bodyPr>
+          <a:lstStyle/>
+          <a:p>
+            <a:r>
+              <a:rPr sz="900" b="1">
+                <a:solidFill>
+                  <a:srgbClr val="5D6675"/>
+                </a:solidFill>
+                <a:latin typeface="Arial"/>
+              </a:rPr>
+              <a:t>22</a:t>
+            </a:r>
+          </a:p>
+        </p:txBody>
+      </p:sp>
+      <p:sp>
+        <p:nvSpPr>
+          <p:cNvPr id="6" name="Rounded Rectangle 5"/>
+          <p:cNvSpPr/>
+          <p:nvPr/>
+        </p:nvSpPr>
+        <p:spPr>
+          <a:xfrm>
+            <a:off x="609600" y="1498600"/>
+            <a:ext cx="3479800" cy="2489200"/>
+          </a:xfrm>
+          <a:prstGeom prst="roundRect">
+            <a:avLst>
+              <a:gd name="adj" fmla="val 3000"/>
+            </a:avLst>
+          </a:prstGeom>
+          <a:solidFill>
+            <a:srgbClr val="F3F4F6"/>
+          </a:solidFill>
+          <a:ln>
+            <a:noFill/>
+          </a:ln>
+          <a:effectLst/>
+        </p:spPr>
+        <p:style>
+          <a:lnRef idx="1">
+            <a:schemeClr val="accent1"/>
+          </a:lnRef>
+          <a:fillRef idx="3">
+            <a:schemeClr val="accent1"/>
+          </a:fillRef>
+          <a:effectRef idx="2">
+            <a:schemeClr val="accent1"/>
+          </a:effectRef>
+          <a:fontRef idx="minor">
+            <a:schemeClr val="lt1"/>
+          </a:fontRef>
+        </p:style>
+        <p:txBody>
+          <a:bodyPr rtlCol="0" anchor="ctr"/>
+          <a:lstStyle/>
+          <a:p>
+            <a:pPr algn="ctr"/>
+          </a:p>
+        </p:txBody>
+      </p:sp>
+      <p:sp>
+        <p:nvSpPr>
+          <p:cNvPr id="7" name="TextBox 6"/>
+          <p:cNvSpPr txBox="1"/>
+          <p:nvPr/>
+        </p:nvSpPr>
+        <p:spPr>
+          <a:xfrm>
+            <a:off x="863600" y="1752600"/>
+            <a:ext cx="2997200" cy="508000"/>
+          </a:xfrm>
+          <a:prstGeom prst="rect">
+            <a:avLst/>
+          </a:prstGeom>
+          <a:noFill/>
+        </p:spPr>
+        <p:txBody>
+          <a:bodyPr wrap="square" lIns="0" rIns="0" tIns="0" bIns="0">
+            <a:spAutoFit/>
+          </a:bodyPr>
+          <a:lstStyle/>
+          <a:p>
+            <a:pPr>
+              <a:lnSpc>
+                <a:spcPct val="115000"/>
+              </a:lnSpc>
+            </a:pPr>
+            <a:r>
+              <a:rPr sz="1300" b="1">
+                <a:solidFill>
+                  <a:srgbClr val="0F766E"/>
+                </a:solidFill>
+                <a:latin typeface="Arial"/>
+              </a:rPr>
+              <a:t>Réussite d'ingénierie</a:t>
+            </a:r>
+          </a:p>
+        </p:txBody>
+      </p:sp>
+      <p:sp>
+        <p:nvSpPr>
+          <p:cNvPr id="8" name="TextBox 7"/>
+          <p:cNvSpPr txBox="1"/>
+          <p:nvPr/>
+        </p:nvSpPr>
+        <p:spPr>
+          <a:xfrm>
+            <a:off x="863600" y="2286000"/>
+            <a:ext cx="3022600" cy="1600200"/>
+          </a:xfrm>
+          <a:prstGeom prst="rect">
+            <a:avLst/>
+          </a:prstGeom>
+          <a:noFill/>
+        </p:spPr>
+        <p:txBody>
+          <a:bodyPr wrap="square" lIns="0" rIns="0" tIns="0" bIns="0">
+            <a:spAutoFit/>
+          </a:bodyPr>
+          <a:lstStyle/>
+          <a:p>
+            <a:pPr>
+              <a:lnSpc>
+                <a:spcPct val="135000"/>
+              </a:lnSpc>
+            </a:pPr>
+            <a:r>
+              <a:rPr sz="1150" b="0">
+                <a:solidFill>
+                  <a:srgbClr val="5D6675"/>
+                </a:solidFill>
+                <a:latin typeface="Arial"/>
+              </a:rPr>
+              <a:t>Univers pré-enregistré et horodaté avant</a:t>
+            </a:r>
+          </a:p>
+          <a:p>
+            <a:pPr>
+              <a:lnSpc>
+                <a:spcPct val="135000"/>
+              </a:lnSpc>
+            </a:pPr>
+            <a:r>
+              <a:rPr sz="1150" b="0">
+                <a:solidFill>
+                  <a:srgbClr val="5D6675"/>
+                </a:solidFill>
+                <a:latin typeface="Arial"/>
+              </a:rPr>
+              <a:t>toute donnée, dix critères de</a:t>
+            </a:r>
+          </a:p>
+          <a:p>
+            <a:pPr>
+              <a:lnSpc>
+                <a:spcPct val="135000"/>
+              </a:lnSpc>
+            </a:pPr>
+            <a:r>
+              <a:rPr sz="1150" b="0">
+                <a:solidFill>
+                  <a:srgbClr val="5D6675"/>
+                </a:solidFill>
+                <a:latin typeface="Arial"/>
+              </a:rPr>
+              <a:t>préparation, raccordé à DVC et Dagster,</a:t>
+            </a:r>
+          </a:p>
+          <a:p>
+            <a:pPr>
+              <a:lnSpc>
+                <a:spcPct val="135000"/>
+              </a:lnSpc>
+            </a:pPr>
+            <a:r>
+              <a:rPr sz="1150" b="0">
+                <a:solidFill>
+                  <a:srgbClr val="5D6675"/>
+                </a:solidFill>
+                <a:latin typeface="Arial"/>
+              </a:rPr>
+              <a:t>puis gelé comme preuve à usage unique.</a:t>
+            </a:r>
+          </a:p>
+        </p:txBody>
+      </p:sp>
+      <p:sp>
+        <p:nvSpPr>
+          <p:cNvPr id="9" name="Rounded Rectangle 8"/>
+          <p:cNvSpPr/>
+          <p:nvPr/>
+        </p:nvSpPr>
+        <p:spPr>
+          <a:xfrm>
+            <a:off x="4343400" y="1498600"/>
+            <a:ext cx="3479800" cy="2489200"/>
+          </a:xfrm>
+          <a:prstGeom prst="roundRect">
+            <a:avLst>
+              <a:gd name="adj" fmla="val 3000"/>
+            </a:avLst>
+          </a:prstGeom>
+          <a:solidFill>
+            <a:srgbClr val="F3F4F6"/>
+          </a:solidFill>
+          <a:ln>
+            <a:noFill/>
+          </a:ln>
+          <a:effectLst/>
+        </p:spPr>
+        <p:style>
+          <a:lnRef idx="1">
+            <a:schemeClr val="accent1"/>
+          </a:lnRef>
+          <a:fillRef idx="3">
+            <a:schemeClr val="accent1"/>
+          </a:fillRef>
+          <a:effectRef idx="2">
+            <a:schemeClr val="accent1"/>
+          </a:effectRef>
+          <a:fontRef idx="minor">
+            <a:schemeClr val="lt1"/>
+          </a:fontRef>
+        </p:style>
+        <p:txBody>
+          <a:bodyPr rtlCol="0" anchor="ctr"/>
+          <a:lstStyle/>
+          <a:p>
+            <a:pPr algn="ctr"/>
+          </a:p>
+        </p:txBody>
+      </p:sp>
+      <p:sp>
+        <p:nvSpPr>
+          <p:cNvPr id="10" name="TextBox 9"/>
+          <p:cNvSpPr txBox="1"/>
+          <p:nvPr/>
+        </p:nvSpPr>
+        <p:spPr>
+          <a:xfrm>
+            <a:off x="4597400" y="1752600"/>
+            <a:ext cx="2997200" cy="508000"/>
+          </a:xfrm>
+          <a:prstGeom prst="rect">
+            <a:avLst/>
+          </a:prstGeom>
+          <a:noFill/>
+        </p:spPr>
+        <p:txBody>
+          <a:bodyPr wrap="square" lIns="0" rIns="0" tIns="0" bIns="0">
+            <a:spAutoFit/>
+          </a:bodyPr>
+          <a:lstStyle/>
+          <a:p>
+            <a:pPr>
+              <a:lnSpc>
+                <a:spcPct val="115000"/>
+              </a:lnSpc>
+            </a:pPr>
+            <a:r>
+              <a:rPr sz="1300" b="1">
+                <a:solidFill>
+                  <a:srgbClr val="3D8DFF"/>
+                </a:solidFill>
+                <a:latin typeface="Arial"/>
+              </a:rPr>
+              <a:t>Réussite méthodologique</a:t>
+            </a:r>
+          </a:p>
+        </p:txBody>
+      </p:sp>
+      <p:sp>
+        <p:nvSpPr>
+          <p:cNvPr id="11" name="TextBox 10"/>
+          <p:cNvSpPr txBox="1"/>
+          <p:nvPr/>
+        </p:nvSpPr>
+        <p:spPr>
+          <a:xfrm>
+            <a:off x="4597400" y="2286000"/>
+            <a:ext cx="3022600" cy="1600200"/>
+          </a:xfrm>
+          <a:prstGeom prst="rect">
+            <a:avLst/>
+          </a:prstGeom>
+          <a:noFill/>
+        </p:spPr>
+        <p:txBody>
+          <a:bodyPr wrap="square" lIns="0" rIns="0" tIns="0" bIns="0">
+            <a:spAutoFit/>
+          </a:bodyPr>
+          <a:lstStyle/>
+          <a:p>
+            <a:pPr>
+              <a:lnSpc>
+                <a:spcPct val="135000"/>
+              </a:lnSpc>
+            </a:pPr>
+            <a:r>
+              <a:rPr sz="1150" b="0">
+                <a:solidFill>
+                  <a:srgbClr val="5D6675"/>
+                </a:solidFill>
+                <a:latin typeface="Arial"/>
+              </a:rPr>
+              <a:t>Un écart sélectionné de +0,093 de Sharpe</a:t>
+            </a:r>
+          </a:p>
+          <a:p>
+            <a:pPr>
+              <a:lnSpc>
+                <a:spcPct val="135000"/>
+              </a:lnSpc>
+            </a:pPr>
+            <a:r>
+              <a:rPr sz="1150" b="0">
+                <a:solidFill>
+                  <a:srgbClr val="5D6675"/>
+                </a:solidFill>
+                <a:latin typeface="Arial"/>
+              </a:rPr>
+              <a:t>a été empêché de devenir un titre.</a:t>
+            </a:r>
+          </a:p>
+          <a:p>
+            <a:pPr>
+              <a:lnSpc>
+                <a:spcPct val="135000"/>
+              </a:lnSpc>
+            </a:pPr>
+            <a:r>
+              <a:rPr sz="1150" b="0">
+                <a:solidFill>
+                  <a:srgbClr val="5D6675"/>
+                </a:solidFill>
+                <a:latin typeface="Arial"/>
+              </a:rPr>
+              <a:t>C'est la contribution la plus</a:t>
+            </a:r>
+          </a:p>
+          <a:p>
+            <a:pPr>
+              <a:lnSpc>
+                <a:spcPct val="135000"/>
+              </a:lnSpc>
+            </a:pPr>
+            <a:r>
+              <a:rPr sz="1150" b="0">
+                <a:solidFill>
+                  <a:srgbClr val="5D6675"/>
+                </a:solidFill>
+                <a:latin typeface="Arial"/>
+              </a:rPr>
+              <a:t>transportable du projet.</a:t>
+            </a:r>
+          </a:p>
+        </p:txBody>
+      </p:sp>
+      <p:sp>
+        <p:nvSpPr>
+          <p:cNvPr id="12" name="Rounded Rectangle 11"/>
+          <p:cNvSpPr/>
+          <p:nvPr/>
+        </p:nvSpPr>
+        <p:spPr>
+          <a:xfrm>
+            <a:off x="8077200" y="1498600"/>
+            <a:ext cx="3479800" cy="2489200"/>
+          </a:xfrm>
+          <a:prstGeom prst="roundRect">
+            <a:avLst>
+              <a:gd name="adj" fmla="val 3000"/>
+            </a:avLst>
+          </a:prstGeom>
+          <a:solidFill>
+            <a:srgbClr val="F3F4F6"/>
+          </a:solidFill>
+          <a:ln>
+            <a:noFill/>
+          </a:ln>
+          <a:effectLst/>
+        </p:spPr>
+        <p:style>
+          <a:lnRef idx="1">
+            <a:schemeClr val="accent1"/>
+          </a:lnRef>
+          <a:fillRef idx="3">
+            <a:schemeClr val="accent1"/>
+          </a:fillRef>
+          <a:effectRef idx="2">
+            <a:schemeClr val="accent1"/>
+          </a:effectRef>
+          <a:fontRef idx="minor">
+            <a:schemeClr val="lt1"/>
+          </a:fontRef>
+        </p:style>
+        <p:txBody>
+          <a:bodyPr rtlCol="0" anchor="ctr"/>
+          <a:lstStyle/>
+          <a:p>
+            <a:pPr algn="ctr"/>
+          </a:p>
+        </p:txBody>
+      </p:sp>
+      <p:sp>
+        <p:nvSpPr>
+          <p:cNvPr id="13" name="TextBox 12"/>
+          <p:cNvSpPr txBox="1"/>
+          <p:nvPr/>
+        </p:nvSpPr>
+        <p:spPr>
+          <a:xfrm>
+            <a:off x="8331200" y="1752600"/>
+            <a:ext cx="2997200" cy="508000"/>
+          </a:xfrm>
+          <a:prstGeom prst="rect">
+            <a:avLst/>
+          </a:prstGeom>
+          <a:noFill/>
+        </p:spPr>
+        <p:txBody>
+          <a:bodyPr wrap="square" lIns="0" rIns="0" tIns="0" bIns="0">
+            <a:spAutoFit/>
+          </a:bodyPr>
+          <a:lstStyle/>
+          <a:p>
+            <a:pPr>
+              <a:lnSpc>
+                <a:spcPct val="115000"/>
+              </a:lnSpc>
+            </a:pPr>
+            <a:r>
+              <a:rPr sz="1300" b="1">
+                <a:solidFill>
+                  <a:srgbClr val="B7433E"/>
+                </a:solidFill>
+                <a:latin typeface="Arial"/>
+              </a:rPr>
+              <a:t>Absence d'avantage établi</a:t>
+            </a:r>
+          </a:p>
+        </p:txBody>
+      </p:sp>
+      <p:sp>
+        <p:nvSpPr>
+          <p:cNvPr id="14" name="TextBox 13"/>
+          <p:cNvSpPr txBox="1"/>
+          <p:nvPr/>
+        </p:nvSpPr>
+        <p:spPr>
+          <a:xfrm>
+            <a:off x="8331200" y="2286000"/>
+            <a:ext cx="3022600" cy="1600200"/>
+          </a:xfrm>
+          <a:prstGeom prst="rect">
+            <a:avLst/>
+          </a:prstGeom>
+          <a:noFill/>
+        </p:spPr>
+        <p:txBody>
+          <a:bodyPr wrap="square" lIns="0" rIns="0" tIns="0" bIns="0">
+            <a:spAutoFit/>
+          </a:bodyPr>
+          <a:lstStyle/>
+          <a:p>
+            <a:pPr>
+              <a:lnSpc>
+                <a:spcPct val="135000"/>
+              </a:lnSpc>
+            </a:pPr>
+            <a:r>
+              <a:rPr sz="1150" b="0">
+                <a:solidFill>
+                  <a:srgbClr val="5D6675"/>
+                </a:solidFill>
+                <a:latin typeface="Arial"/>
+              </a:rPr>
+              <a:t>Ni la couche de régimes (Q1) ni la</a:t>
+            </a:r>
+          </a:p>
+          <a:p>
+            <a:pPr>
+              <a:lnSpc>
+                <a:spcPct val="135000"/>
+              </a:lnSpc>
+            </a:pPr>
+            <a:r>
+              <a:rPr sz="1150" b="0">
+                <a:solidFill>
+                  <a:srgbClr val="5D6675"/>
+                </a:solidFill>
+                <a:latin typeface="Arial"/>
+              </a:rPr>
+              <a:t>famille de challengers (Q2) n'établit</a:t>
+            </a:r>
+          </a:p>
+          <a:p>
+            <a:pPr>
+              <a:lnSpc>
+                <a:spcPct val="135000"/>
+              </a:lnSpc>
+            </a:pPr>
+            <a:r>
+              <a:rPr sz="1150" b="0">
+                <a:solidFill>
+                  <a:srgbClr val="5D6675"/>
+                </a:solidFill>
+                <a:latin typeface="Arial"/>
+              </a:rPr>
+              <a:t>de supériorité sur des règles de</a:t>
+            </a:r>
+          </a:p>
+          <a:p>
+            <a:pPr>
+              <a:lnSpc>
+                <a:spcPct val="135000"/>
+              </a:lnSpc>
+            </a:pPr>
+            <a:r>
+              <a:rPr sz="1150" b="0">
+                <a:solidFill>
+                  <a:srgbClr val="5D6675"/>
+                </a:solidFill>
+                <a:latin typeface="Arial"/>
+              </a:rPr>
+              <a:t>portefeuille plus simples.</a:t>
+            </a:r>
+          </a:p>
+        </p:txBody>
+      </p:sp>
+      <p:sp>
+        <p:nvSpPr>
+          <p:cNvPr id="15" name="Rounded Rectangle 14"/>
+          <p:cNvSpPr/>
+          <p:nvPr/>
+        </p:nvSpPr>
+        <p:spPr>
+          <a:xfrm>
+            <a:off x="609600" y="4470400"/>
+            <a:ext cx="10591800" cy="1041400"/>
+          </a:xfrm>
+          <a:prstGeom prst="roundRect">
+            <a:avLst>
+              <a:gd name="adj" fmla="val 3000"/>
+            </a:avLst>
+          </a:prstGeom>
+          <a:solidFill>
+            <a:srgbClr val="FFF0D5"/>
+          </a:solidFill>
+          <a:ln>
+            <a:noFill/>
+          </a:ln>
+          <a:effectLst/>
+        </p:spPr>
+        <p:style>
+          <a:lnRef idx="1">
+            <a:schemeClr val="accent1"/>
+          </a:lnRef>
+          <a:fillRef idx="3">
+            <a:schemeClr val="accent1"/>
+          </a:fillRef>
+          <a:effectRef idx="2">
+            <a:schemeClr val="accent1"/>
+          </a:effectRef>
+          <a:fontRef idx="minor">
+            <a:schemeClr val="lt1"/>
+          </a:fontRef>
+        </p:style>
+        <p:txBody>
+          <a:bodyPr rtlCol="0" anchor="ctr"/>
+          <a:lstStyle/>
+          <a:p>
+            <a:pPr algn="ctr"/>
+          </a:p>
+        </p:txBody>
+      </p:sp>
+      <p:sp>
+        <p:nvSpPr>
+          <p:cNvPr id="16" name="TextBox 15"/>
+          <p:cNvSpPr txBox="1"/>
+          <p:nvPr/>
+        </p:nvSpPr>
+        <p:spPr>
+          <a:xfrm>
+            <a:off x="889000" y="4673600"/>
+            <a:ext cx="5080000" cy="228600"/>
+          </a:xfrm>
+          <a:prstGeom prst="rect">
+            <a:avLst/>
+          </a:prstGeom>
+          <a:noFill/>
+        </p:spPr>
+        <p:txBody>
+          <a:bodyPr wrap="square" lIns="0" rIns="0" tIns="0" bIns="0">
+            <a:spAutoFit/>
+          </a:bodyPr>
+          <a:lstStyle/>
+          <a:p>
+            <a:r>
+              <a:rPr sz="1050" b="1">
+                <a:solidFill>
+                  <a:srgbClr val="A86812"/>
+                </a:solidFill>
+                <a:latin typeface="Arial"/>
+              </a:rPr>
+              <a:t>Le message</a:t>
+            </a:r>
+          </a:p>
+        </p:txBody>
+      </p:sp>
+      <p:sp>
+        <p:nvSpPr>
+          <p:cNvPr id="17" name="TextBox 16"/>
+          <p:cNvSpPr txBox="1"/>
+          <p:nvPr/>
+        </p:nvSpPr>
+        <p:spPr>
+          <a:xfrm>
+            <a:off x="889000" y="4953000"/>
+            <a:ext cx="10033000" cy="457200"/>
+          </a:xfrm>
+          <a:prstGeom prst="rect">
+            <a:avLst/>
+          </a:prstGeom>
+          <a:noFill/>
+        </p:spPr>
+        <p:txBody>
+          <a:bodyPr wrap="square" lIns="0" rIns="0" tIns="0" bIns="0">
+            <a:spAutoFit/>
+          </a:bodyPr>
+          <a:lstStyle/>
+          <a:p>
+            <a:pPr>
+              <a:lnSpc>
+                <a:spcPct val="125000"/>
+              </a:lnSpc>
+            </a:pPr>
+            <a:r>
+              <a:rPr sz="1250" b="1">
+                <a:solidFill>
+                  <a:srgbClr val="111827"/>
+                </a:solidFill>
+                <a:latin typeface="Arial"/>
+              </a:rPr>
+              <a:t>Une fois les deux défauts d'identification levés, les modèles complexes ont enfin reçu un test équitable — et n'ont toujours pas établi d'avantage.</a:t>
+            </a:r>
+          </a:p>
+        </p:txBody>
+      </p:sp>
+      <p:sp>
+        <p:nvSpPr>
+          <p:cNvPr id="18" name="TextBox 17"/>
+          <p:cNvSpPr txBox="1"/>
+          <p:nvPr/>
+        </p:nvSpPr>
+        <p:spPr>
+          <a:xfrm>
+            <a:off x="609600" y="5715000"/>
+            <a:ext cx="10591800" cy="431800"/>
+          </a:xfrm>
+          <a:prstGeom prst="rect">
+            <a:avLst/>
+          </a:prstGeom>
+          <a:noFill/>
+        </p:spPr>
+        <p:txBody>
+          <a:bodyPr wrap="square" lIns="0" rIns="0" tIns="0" bIns="0">
+            <a:spAutoFit/>
+          </a:bodyPr>
+          <a:lstStyle/>
+          <a:p>
+            <a:r>
+              <a:rPr sz="1150" b="0">
+                <a:solidFill>
+                  <a:srgbClr val="5D6675"/>
+                </a:solidFill>
+                <a:latin typeface="Arial"/>
+              </a:rPr>
+              <a:t>La contribution est la preuve auditable montrant pourquoi le gagnant brut, pourtant séduisant, ne doit pas être cru.</a:t>
+            </a:r>
+          </a:p>
+        </p:txBody>
+      </p:sp>
+    </p:spTree>
+  </p:cSld>
+  <p:clrMapOvr>
+    <a:masterClrMapping/>
+  </p:clrMapOvr>
 </p:sld>
 </file>
 
@@ -14018,6 +17645,10 @@
             <a:prstDash val="solid"/>
           </a:ln>
         </p:spPr>
+        <p:txBody xmlns:a="http://schemas.openxmlformats.org/drawingml/2006/main">
+          <a:bodyPr/>
+          <a:p/>
+        </p:txBody>
       </p:sp>
       <p:pic>
         <p:nvPicPr>
@@ -14189,6 +17820,10 @@
             <a:prstDash val="solid"/>
           </a:ln>
         </p:spPr>
+        <p:txBody xmlns:a="http://schemas.openxmlformats.org/drawingml/2006/main">
+          <a:bodyPr/>
+          <a:p/>
+        </p:txBody>
       </p:sp>
       <p:sp>
         <p:nvSpPr>
@@ -14338,6 +17973,10 @@
             <a:prstDash val="solid"/>
           </a:ln>
         </p:spPr>
+        <p:txBody xmlns:a="http://schemas.openxmlformats.org/drawingml/2006/main">
+          <a:bodyPr/>
+          <a:p/>
+        </p:txBody>
       </p:sp>
       <p:sp>
         <p:nvSpPr>
@@ -14487,6 +18126,10 @@
             <a:prstDash val="solid"/>
           </a:ln>
         </p:spPr>
+        <p:txBody xmlns:a="http://schemas.openxmlformats.org/drawingml/2006/main">
+          <a:bodyPr/>
+          <a:p/>
+        </p:txBody>
       </p:sp>
       <p:sp>
         <p:nvSpPr>
@@ -14841,6 +18484,10 @@
             <a:prstDash val="solid"/>
           </a:ln>
         </p:spPr>
+        <p:txBody xmlns:a="http://schemas.openxmlformats.org/drawingml/2006/main">
+          <a:bodyPr/>
+          <a:p/>
+        </p:txBody>
       </p:sp>
       <p:pic>
         <p:nvPicPr>
@@ -14896,6 +18543,10 @@
             <a:prstDash val="solid"/>
           </a:ln>
         </p:spPr>
+        <p:txBody xmlns:a="http://schemas.openxmlformats.org/drawingml/2006/main">
+          <a:bodyPr/>
+          <a:p/>
+        </p:txBody>
       </p:sp>
       <p:sp>
         <p:nvSpPr>
@@ -14987,6 +18638,10 @@
             <a:prstDash val="solid"/>
           </a:ln>
         </p:spPr>
+        <p:txBody xmlns:a="http://schemas.openxmlformats.org/drawingml/2006/main">
+          <a:bodyPr/>
+          <a:p/>
+        </p:txBody>
       </p:sp>
       <p:sp>
         <p:nvSpPr>
@@ -15078,6 +18733,10 @@
             <a:prstDash val="solid"/>
           </a:ln>
         </p:spPr>
+        <p:txBody xmlns:a="http://schemas.openxmlformats.org/drawingml/2006/main">
+          <a:bodyPr/>
+          <a:p/>
+        </p:txBody>
       </p:sp>
       <p:sp>
         <p:nvSpPr>
@@ -15169,6 +18828,10 @@
             <a:prstDash val="solid"/>
           </a:ln>
         </p:spPr>
+        <p:txBody xmlns:a="http://schemas.openxmlformats.org/drawingml/2006/main">
+          <a:bodyPr/>
+          <a:p/>
+        </p:txBody>
       </p:sp>
       <p:sp>
         <p:nvSpPr>
@@ -15260,6 +18923,10 @@
             <a:prstDash val="solid"/>
           </a:ln>
         </p:spPr>
+        <p:txBody xmlns:a="http://schemas.openxmlformats.org/drawingml/2006/main">
+          <a:bodyPr/>
+          <a:p/>
+        </p:txBody>
       </p:sp>
       <p:sp>
         <p:nvSpPr>
@@ -15556,6 +19223,10 @@
             <a:prstDash val="solid"/>
           </a:ln>
         </p:spPr>
+        <p:txBody xmlns:a="http://schemas.openxmlformats.org/drawingml/2006/main">
+          <a:bodyPr/>
+          <a:p/>
+        </p:txBody>
       </p:sp>
       <p:pic>
         <p:nvPicPr>
@@ -15611,6 +19282,10 @@
             <a:prstDash val="solid"/>
           </a:ln>
         </p:spPr>
+        <p:txBody xmlns:a="http://schemas.openxmlformats.org/drawingml/2006/main">
+          <a:bodyPr/>
+          <a:p/>
+        </p:txBody>
       </p:sp>
       <p:sp>
         <p:nvSpPr>
@@ -15806,6 +19481,10 @@
             <a:prstDash val="solid"/>
           </a:ln>
         </p:spPr>
+        <p:txBody xmlns:a="http://schemas.openxmlformats.org/drawingml/2006/main">
+          <a:bodyPr/>
+          <a:p/>
+        </p:txBody>
       </p:sp>
       <p:sp>
         <p:nvSpPr>
@@ -16262,6 +19941,10 @@
             <a:prstDash val="solid"/>
           </a:ln>
         </p:spPr>
+        <p:txBody xmlns:a="http://schemas.openxmlformats.org/drawingml/2006/main">
+          <a:bodyPr/>
+          <a:p/>
+        </p:txBody>
       </p:sp>
       <p:sp>
         <p:nvSpPr>
@@ -16409,6 +20092,10 @@
             <a:prstDash val="solid"/>
           </a:ln>
         </p:spPr>
+        <p:txBody xmlns:a="http://schemas.openxmlformats.org/drawingml/2006/main">
+          <a:bodyPr/>
+          <a:p/>
+        </p:txBody>
       </p:sp>
       <p:sp>
         <p:nvSpPr>
@@ -16558,6 +20245,10 @@
             <a:prstDash val="solid"/>
           </a:ln>
         </p:spPr>
+        <p:txBody xmlns:a="http://schemas.openxmlformats.org/drawingml/2006/main">
+          <a:bodyPr/>
+          <a:p/>
+        </p:txBody>
       </p:sp>
       <p:sp>
         <p:nvSpPr>
@@ -16705,6 +20396,10 @@
             <a:prstDash val="solid"/>
           </a:ln>
         </p:spPr>
+        <p:txBody xmlns:a="http://schemas.openxmlformats.org/drawingml/2006/main">
+          <a:bodyPr/>
+          <a:p/>
+        </p:txBody>
       </p:sp>
       <p:sp>
         <p:nvSpPr>
@@ -16854,6 +20549,10 @@
             <a:prstDash val="solid"/>
           </a:ln>
         </p:spPr>
+        <p:txBody xmlns:a="http://schemas.openxmlformats.org/drawingml/2006/main">
+          <a:bodyPr/>
+          <a:p/>
+        </p:txBody>
       </p:sp>
       <p:sp>
         <p:nvSpPr>
@@ -17001,6 +20700,10 @@
             <a:prstDash val="solid"/>
           </a:ln>
         </p:spPr>
+        <p:txBody xmlns:a="http://schemas.openxmlformats.org/drawingml/2006/main">
+          <a:bodyPr/>
+          <a:p/>
+        </p:txBody>
       </p:sp>
       <p:sp>
         <p:nvSpPr>
@@ -17150,6 +20853,10 @@
             <a:prstDash val="solid"/>
           </a:ln>
         </p:spPr>
+        <p:txBody xmlns:a="http://schemas.openxmlformats.org/drawingml/2006/main">
+          <a:bodyPr/>
+          <a:p/>
+        </p:txBody>
       </p:sp>
       <p:sp>
         <p:nvSpPr>
@@ -17297,6 +21004,10 @@
             <a:prstDash val="solid"/>
           </a:ln>
         </p:spPr>
+        <p:txBody xmlns:a="http://schemas.openxmlformats.org/drawingml/2006/main">
+          <a:bodyPr/>
+          <a:p/>
+        </p:txBody>
       </p:sp>
       <p:sp>
         <p:nvSpPr>
@@ -17446,6 +21157,10 @@
             <a:prstDash val="solid"/>
           </a:ln>
         </p:spPr>
+        <p:txBody xmlns:a="http://schemas.openxmlformats.org/drawingml/2006/main">
+          <a:bodyPr/>
+          <a:p/>
+        </p:txBody>
       </p:sp>
       <p:sp>
         <p:nvSpPr>
@@ -17593,6 +21308,10 @@
             <a:prstDash val="solid"/>
           </a:ln>
         </p:spPr>
+        <p:txBody xmlns:a="http://schemas.openxmlformats.org/drawingml/2006/main">
+          <a:bodyPr/>
+          <a:p/>
+        </p:txBody>
       </p:sp>
       <p:sp>
         <p:nvSpPr>
@@ -17684,6 +21403,10 @@
             <a:prstDash val="solid"/>
           </a:ln>
         </p:spPr>
+        <p:txBody xmlns:a="http://schemas.openxmlformats.org/drawingml/2006/main">
+          <a:bodyPr/>
+          <a:p/>
+        </p:txBody>
       </p:sp>
       <p:sp>
         <p:nvSpPr>
@@ -17980,6 +21703,10 @@
             <a:prstDash val="solid"/>
           </a:ln>
         </p:spPr>
+        <p:txBody xmlns:a="http://schemas.openxmlformats.org/drawingml/2006/main">
+          <a:bodyPr/>
+          <a:p/>
+        </p:txBody>
       </p:sp>
       <p:pic>
         <p:nvPicPr>
@@ -18035,6 +21762,10 @@
             <a:prstDash val="solid"/>
           </a:ln>
         </p:spPr>
+        <p:txBody xmlns:a="http://schemas.openxmlformats.org/drawingml/2006/main">
+          <a:bodyPr/>
+          <a:p/>
+        </p:txBody>
       </p:sp>
       <p:sp>
         <p:nvSpPr>
@@ -18184,6 +21915,10 @@
             <a:prstDash val="solid"/>
           </a:ln>
         </p:spPr>
+        <p:txBody xmlns:a="http://schemas.openxmlformats.org/drawingml/2006/main">
+          <a:bodyPr/>
+          <a:p/>
+        </p:txBody>
       </p:sp>
       <p:sp>
         <p:nvSpPr>
@@ -18333,6 +22068,10 @@
             <a:prstDash val="solid"/>
           </a:ln>
         </p:spPr>
+        <p:txBody xmlns:a="http://schemas.openxmlformats.org/drawingml/2006/main">
+          <a:bodyPr/>
+          <a:p/>
+        </p:txBody>
       </p:sp>
       <p:sp>
         <p:nvSpPr>
@@ -18482,6 +22221,10 @@
             <a:prstDash val="solid"/>
           </a:ln>
         </p:spPr>
+        <p:txBody xmlns:a="http://schemas.openxmlformats.org/drawingml/2006/main">
+          <a:bodyPr/>
+          <a:p/>
+        </p:txBody>
       </p:sp>
       <p:sp>
         <p:nvSpPr>
@@ -18836,6 +22579,10 @@
             <a:prstDash val="solid"/>
           </a:ln>
         </p:spPr>
+        <p:txBody xmlns:a="http://schemas.openxmlformats.org/drawingml/2006/main">
+          <a:bodyPr/>
+          <a:p/>
+        </p:txBody>
       </p:sp>
       <p:pic>
         <p:nvPicPr>
@@ -19239,6 +22986,10 @@
             <a:prstDash val="solid"/>
           </a:ln>
         </p:spPr>
+        <p:txBody xmlns:a="http://schemas.openxmlformats.org/drawingml/2006/main">
+          <a:bodyPr/>
+          <a:p/>
+        </p:txBody>
       </p:sp>
       <p:sp>
         <p:nvSpPr>
@@ -19535,6 +23286,10 @@
             <a:prstDash val="solid"/>
           </a:ln>
         </p:spPr>
+        <p:txBody xmlns:a="http://schemas.openxmlformats.org/drawingml/2006/main">
+          <a:bodyPr/>
+          <a:p/>
+        </p:txBody>
       </p:sp>
       <p:pic>
         <p:nvPicPr>
@@ -19590,6 +23345,10 @@
             <a:prstDash val="solid"/>
           </a:ln>
         </p:spPr>
+        <p:txBody xmlns:a="http://schemas.openxmlformats.org/drawingml/2006/main">
+          <a:bodyPr/>
+          <a:p/>
+        </p:txBody>
       </p:sp>
       <p:sp>
         <p:nvSpPr>
@@ -19913,6 +23672,10 @@
             <a:prstDash val="solid"/>
           </a:ln>
         </p:spPr>
+        <p:txBody xmlns:a="http://schemas.openxmlformats.org/drawingml/2006/main">
+          <a:bodyPr/>
+          <a:p/>
+        </p:txBody>
       </p:sp>
       <p:sp>
         <p:nvSpPr>
